--- a/python-course-ppt/逐节课件/Python讲授课件-单元19.pptx
+++ b/python-course-ppt/逐节课件/Python讲授课件-单元19.pptx
@@ -335,6 +335,86 @@
           </a:p>
         </p:txBody>
       </p:sp>
+      <p:sp>
+        <p:nvSpPr>
+          <p:cNvPr id="2" name="讲课提示"/>
+          <p:cNvSpPr txBox="1"/>
+          <p:nvPr/>
+        </p:nvSpPr>
+        <p:spPr>
+          <a:xfrm>
+            <a:off x="457200" y="457200"/>
+            <a:ext cx="6858000" cy="4800600"/>
+          </a:xfrm>
+          <a:prstGeom prst="rect">
+            <a:avLst/>
+          </a:prstGeom>
+        </p:spPr>
+        <p:txBody>
+          <a:bodyPr wrap="square"/>
+          <a:lstStyle/>
+          <a:p>
+            <a:r>
+              <a:rPr lang="zh-CN" dirty="0"/>
+              <a:t>单元 19 · 单元 19 · 用户账户</a:t>
+            </a:r>
+          </a:p>
+          <a:p>
+            <a:r>
+              <a:rPr lang="zh-CN" dirty="0"/>
+              <a:t/>
+            </a:r>
+          </a:p>
+          <a:p>
+            <a:r>
+              <a:rPr lang="zh-CN" dirty="0"/>
+              <a:t>本单元包含以下课节：</a:t>
+            </a:r>
+          </a:p>
+          <a:p>
+            <a:r>
+              <a:rPr lang="zh-CN" dirty="0"/>
+              <a:t>· 第 98 节 表单与数据归属三段式</a:t>
+            </a:r>
+          </a:p>
+          <a:p>
+            <a:r>
+              <a:rPr lang="zh-CN" dirty="0"/>
+              <a:t>· 第 99 节 登录、注销与注册三件套</a:t>
+            </a:r>
+          </a:p>
+          <a:p>
+            <a:r>
+              <a:rPr lang="zh-CN" dirty="0"/>
+              <a:t>· 第 100 节 ★ @login_required 与数据隔离红线</a:t>
+            </a:r>
+          </a:p>
+          <a:p>
+            <a:r>
+              <a:rPr lang="zh-CN" dirty="0"/>
+              <a:t>· 第 101 节 edit_entry 的双重保护</a:t>
+            </a:r>
+          </a:p>
+          <a:p>
+            <a:r>
+              <a:rPr lang="zh-CN" dirty="0"/>
+              <a:t>· 第 102 节 动手实战、答案与验收复盘</a:t>
+            </a:r>
+          </a:p>
+          <a:p>
+            <a:r>
+              <a:rPr lang="zh-CN" dirty="0"/>
+              <a:t/>
+            </a:r>
+          </a:p>
+          <a:p>
+            <a:r>
+              <a:rPr lang="zh-CN" dirty="0"/>
+              <a:t>开场用 3 分钟讲清：这个单元学完能做出什么，最后会被关卡怎么验。</a:t>
+            </a:r>
+          </a:p>
+        </p:txBody>
+      </p:sp>
     </p:spTree>
   </p:cSld>
   <p:clrMapOvr>
@@ -458,6 +538,104 @@
           </a:p>
         </p:txBody>
       </p:sp>
+      <p:sp>
+        <p:nvSpPr>
+          <p:cNvPr id="2" name="讲课提示"/>
+          <p:cNvSpPr txBox="1"/>
+          <p:nvPr/>
+        </p:nvSpPr>
+        <p:spPr>
+          <a:xfrm>
+            <a:off x="457200" y="457200"/>
+            <a:ext cx="6858000" cy="4800600"/>
+          </a:xfrm>
+          <a:prstGeom prst="rect">
+            <a:avLst/>
+          </a:prstGeom>
+        </p:spPr>
+        <p:txBody>
+          <a:bodyPr wrap="square"/>
+          <a:lstStyle/>
+          <a:p>
+            <a:r>
+              <a:rPr lang="zh-CN" dirty="0"/>
+              <a:t>第 102 节 · 动手实战、答案与验收复盘</a:t>
+            </a:r>
+          </a:p>
+          <a:p>
+            <a:r>
+              <a:rPr lang="zh-CN" dirty="0"/>
+              <a:t>单元 19 · 用户账户 · W26</a:t>
+            </a:r>
+          </a:p>
+          <a:p>
+            <a:r>
+              <a:rPr lang="zh-CN" dirty="0"/>
+              <a:t/>
+            </a:r>
+          </a:p>
+          <a:p>
+            <a:r>
+              <a:rPr lang="zh-CN" dirty="0"/>
+              <a:t>学习目标：独立完成单元 19 练习，守住数据隔离红线</a:t>
+            </a:r>
+          </a:p>
+          <a:p>
+            <a:r>
+              <a:rPr lang="zh-CN" dirty="0"/>
+              <a:t/>
+            </a:r>
+          </a:p>
+          <a:p>
+            <a:r>
+              <a:rPr lang="zh-CN" dirty="0"/>
+              <a:t>课堂实操（40 分钟，不看答案）：</a:t>
+            </a:r>
+          </a:p>
+          <a:p>
+            <a:r>
+              <a:rPr lang="zh-CN" dirty="0"/>
+              <a:t>· 限时 40 分钟独立完成基础档</a:t>
+            </a:r>
+          </a:p>
+          <a:p>
+            <a:r>
+              <a:rPr lang="zh-CN" dirty="0"/>
+              <a:t>· 逐条演示六、里的每个错误</a:t>
+            </a:r>
+          </a:p>
+          <a:p>
+            <a:r>
+              <a:rPr lang="zh-CN" dirty="0"/>
+              <a:t/>
+            </a:r>
+          </a:p>
+          <a:p>
+            <a:r>
+              <a:rPr lang="zh-CN" dirty="0"/>
+              <a:t>课后作业：</a:t>
+            </a:r>
+          </a:p>
+          <a:p>
+            <a:r>
+              <a:rPr lang="zh-CN" dirty="0"/>
+              <a:t>· ★ 产出：带注册登录的完整学习笔记</a:t>
+            </a:r>
+          </a:p>
+          <a:p>
+            <a:r>
+              <a:rPr lang="zh-CN" dirty="0"/>
+              <a:t/>
+            </a:r>
+          </a:p>
+          <a:p>
+            <a:r>
+              <a:rPr lang="zh-CN" dirty="0"/>
+              <a:t>节奏：讲 20 分钟 → 学员自己敲 40 分钟（不看答案）→ 对讲评自查 20 分钟 → 写作业 10 分钟。</a:t>
+            </a:r>
+          </a:p>
+        </p:txBody>
+      </p:sp>
     </p:spTree>
   </p:cSld>
   <p:clrMapOvr>
@@ -551,6 +729,74 @@
           </a:p>
         </p:txBody>
       </p:sp>
+      <p:sp>
+        <p:nvSpPr>
+          <p:cNvPr id="2" name="讲课提示"/>
+          <p:cNvSpPr txBox="1"/>
+          <p:nvPr/>
+        </p:nvSpPr>
+        <p:spPr>
+          <a:xfrm>
+            <a:off x="457200" y="457200"/>
+            <a:ext cx="6858000" cy="4800600"/>
+          </a:xfrm>
+          <a:prstGeom prst="rect">
+            <a:avLst/>
+          </a:prstGeom>
+        </p:spPr>
+        <p:txBody>
+          <a:bodyPr wrap="square"/>
+          <a:lstStyle/>
+          <a:p>
+            <a:r>
+              <a:rPr lang="zh-CN" dirty="0"/>
+              <a:t>第 102 节 · 核心知识点：动手实战、答案与验收复盘</a:t>
+            </a:r>
+          </a:p>
+          <a:p>
+            <a:r>
+              <a:rPr lang="zh-CN" dirty="0"/>
+              <a:t/>
+            </a:r>
+          </a:p>
+          <a:p>
+            <a:r>
+              <a:rPr lang="zh-CN" dirty="0"/>
+              <a:t>讲这一页时：先让学生说出上节课的结论，再逐块讲要点。</a:t>
+            </a:r>
+          </a:p>
+          <a:p>
+            <a:r>
+              <a:rPr lang="zh-CN" dirty="0"/>
+              <a:t>每讲完一块，问一句「这一步如果写错了，报错会长什么样？」——把错误提前讲。</a:t>
+            </a:r>
+          </a:p>
+          <a:p>
+            <a:r>
+              <a:rPr lang="zh-CN" dirty="0"/>
+              <a:t/>
+            </a:r>
+          </a:p>
+          <a:p>
+            <a:r>
+              <a:rPr lang="zh-CN" dirty="0"/>
+              <a:t>本节目标：独立完成单元 19 练习，守住数据隔离红线</a:t>
+            </a:r>
+          </a:p>
+          <a:p>
+            <a:r>
+              <a:rPr lang="zh-CN" dirty="0"/>
+              <a:t/>
+            </a:r>
+          </a:p>
+          <a:p>
+            <a:r>
+              <a:rPr lang="zh-CN" dirty="0"/>
+              <a:t>看不到懂的地方，回讲义对应小节读一遍，再回来对着这页复述一次——能讲出来才算真懂。</a:t>
+            </a:r>
+          </a:p>
+        </p:txBody>
+      </p:sp>
     </p:spTree>
   </p:cSld>
   <p:clrMapOvr>
@@ -620,6 +866,50 @@
           </a:p>
         </p:txBody>
       </p:sp>
+      <p:sp>
+        <p:nvSpPr>
+          <p:cNvPr id="2" name="讲课提示"/>
+          <p:cNvSpPr txBox="1"/>
+          <p:nvPr/>
+        </p:nvSpPr>
+        <p:spPr>
+          <a:xfrm>
+            <a:off x="457200" y="457200"/>
+            <a:ext cx="6858000" cy="4800600"/>
+          </a:xfrm>
+          <a:prstGeom prst="rect">
+            <a:avLst/>
+          </a:prstGeom>
+        </p:spPr>
+        <p:txBody>
+          <a:bodyPr wrap="square"/>
+          <a:lstStyle/>
+          <a:p>
+            <a:r>
+              <a:rPr lang="zh-CN" dirty="0"/>
+              <a:t>单元 19 小结 · 单元 19 · 小结</a:t>
+            </a:r>
+          </a:p>
+          <a:p>
+            <a:r>
+              <a:rPr lang="zh-CN" dirty="0"/>
+              <a:t/>
+            </a:r>
+          </a:p>
+          <a:p>
+            <a:r>
+              <a:rPr lang="zh-CN" dirty="0"/>
+              <a:t>收尾动作：让学生合上讲义，口述本单元三个最重要的结论；说不出来的，回对应课节。</a:t>
+            </a:r>
+          </a:p>
+          <a:p>
+            <a:r>
+              <a:rPr lang="zh-CN" dirty="0"/>
+              <a:t>然后当场勾一遍本单元课节的「已完成」，没打勾的进下一单元前补掉。</a:t>
+            </a:r>
+          </a:p>
+        </p:txBody>
+      </p:sp>
     </p:spTree>
   </p:cSld>
   <p:clrMapOvr>
@@ -743,6 +1033,104 @@
           </a:p>
         </p:txBody>
       </p:sp>
+      <p:sp>
+        <p:nvSpPr>
+          <p:cNvPr id="2" name="讲课提示"/>
+          <p:cNvSpPr txBox="1"/>
+          <p:nvPr/>
+        </p:nvSpPr>
+        <p:spPr>
+          <a:xfrm>
+            <a:off x="457200" y="457200"/>
+            <a:ext cx="6858000" cy="4800600"/>
+          </a:xfrm>
+          <a:prstGeom prst="rect">
+            <a:avLst/>
+          </a:prstGeom>
+        </p:spPr>
+        <p:txBody>
+          <a:bodyPr wrap="square"/>
+          <a:lstStyle/>
+          <a:p>
+            <a:r>
+              <a:rPr lang="zh-CN" dirty="0"/>
+              <a:t>第 98 节 · 表单与数据归属三段式</a:t>
+            </a:r>
+          </a:p>
+          <a:p>
+            <a:r>
+              <a:rPr lang="zh-CN" dirty="0"/>
+              <a:t>单元 19 · 用户账户 · W25</a:t>
+            </a:r>
+          </a:p>
+          <a:p>
+            <a:r>
+              <a:rPr lang="zh-CN" dirty="0"/>
+              <a:t/>
+            </a:r>
+          </a:p>
+          <a:p>
+            <a:r>
+              <a:rPr lang="zh-CN" dirty="0"/>
+              <a:t>学习目标：会用 ModelForm；掌握 `is_valid → save(commit=False) → 补 owner → save`</a:t>
+            </a:r>
+          </a:p>
+          <a:p>
+            <a:r>
+              <a:rPr lang="zh-CN" dirty="0"/>
+              <a:t/>
+            </a:r>
+          </a:p>
+          <a:p>
+            <a:r>
+              <a:rPr lang="zh-CN" dirty="0"/>
+              <a:t>课堂实操（40 分钟，不看答案）：</a:t>
+            </a:r>
+          </a:p>
+          <a:p>
+            <a:r>
+              <a:rPr lang="zh-CN" dirty="0"/>
+              <a:t>· 实现一个 ModelForm 并渲染它</a:t>
+            </a:r>
+          </a:p>
+          <a:p>
+            <a:r>
+              <a:rPr lang="zh-CN" dirty="0"/>
+              <a:t>· 故意不补 owner，看数据归属错在哪</a:t>
+            </a:r>
+          </a:p>
+          <a:p>
+            <a:r>
+              <a:rPr lang="zh-CN" dirty="0"/>
+              <a:t/>
+            </a:r>
+          </a:p>
+          <a:p>
+            <a:r>
+              <a:rPr lang="zh-CN" dirty="0"/>
+              <a:t>课后作业：</a:t>
+            </a:r>
+          </a:p>
+          <a:p>
+            <a:r>
+              <a:rPr lang="zh-CN" dirty="0"/>
+              <a:t>· 完成教材 19.1 全部动手练</a:t>
+            </a:r>
+          </a:p>
+          <a:p>
+            <a:r>
+              <a:rPr lang="zh-CN" dirty="0"/>
+              <a:t/>
+            </a:r>
+          </a:p>
+          <a:p>
+            <a:r>
+              <a:rPr lang="zh-CN" dirty="0"/>
+              <a:t>节奏：讲 20 分钟 → 学员自己敲 40 分钟（不看答案）→ 对讲评自查 20 分钟 → 写作业 10 分钟。</a:t>
+            </a:r>
+          </a:p>
+        </p:txBody>
+      </p:sp>
     </p:spTree>
   </p:cSld>
   <p:clrMapOvr>
@@ -836,6 +1224,74 @@
           </a:p>
         </p:txBody>
       </p:sp>
+      <p:sp>
+        <p:nvSpPr>
+          <p:cNvPr id="2" name="讲课提示"/>
+          <p:cNvSpPr txBox="1"/>
+          <p:nvPr/>
+        </p:nvSpPr>
+        <p:spPr>
+          <a:xfrm>
+            <a:off x="457200" y="457200"/>
+            <a:ext cx="6858000" cy="4800600"/>
+          </a:xfrm>
+          <a:prstGeom prst="rect">
+            <a:avLst/>
+          </a:prstGeom>
+        </p:spPr>
+        <p:txBody>
+          <a:bodyPr wrap="square"/>
+          <a:lstStyle/>
+          <a:p>
+            <a:r>
+              <a:rPr lang="zh-CN" dirty="0"/>
+              <a:t>第 98 节 · 核心知识点：表单与数据归属三段式</a:t>
+            </a:r>
+          </a:p>
+          <a:p>
+            <a:r>
+              <a:rPr lang="zh-CN" dirty="0"/>
+              <a:t/>
+            </a:r>
+          </a:p>
+          <a:p>
+            <a:r>
+              <a:rPr lang="zh-CN" dirty="0"/>
+              <a:t>讲这一页时：先让学生说出上节课的结论，再逐块讲要点。</a:t>
+            </a:r>
+          </a:p>
+          <a:p>
+            <a:r>
+              <a:rPr lang="zh-CN" dirty="0"/>
+              <a:t>每讲完一块，问一句「这一步如果写错了，报错会长什么样？」——把错误提前讲。</a:t>
+            </a:r>
+          </a:p>
+          <a:p>
+            <a:r>
+              <a:rPr lang="zh-CN" dirty="0"/>
+              <a:t/>
+            </a:r>
+          </a:p>
+          <a:p>
+            <a:r>
+              <a:rPr lang="zh-CN" dirty="0"/>
+              <a:t>本节目标：会用 ModelForm；掌握 `is_valid → save(commit=False) → 补 owner → save`</a:t>
+            </a:r>
+          </a:p>
+          <a:p>
+            <a:r>
+              <a:rPr lang="zh-CN" dirty="0"/>
+              <a:t/>
+            </a:r>
+          </a:p>
+          <a:p>
+            <a:r>
+              <a:rPr lang="zh-CN" dirty="0"/>
+              <a:t>看不到懂的地方，回讲义对应小节读一遍，再回来对着这页复述一次——能讲出来才算真懂。</a:t>
+            </a:r>
+          </a:p>
+        </p:txBody>
+      </p:sp>
     </p:spTree>
   </p:cSld>
   <p:clrMapOvr>
@@ -959,6 +1415,104 @@
           </a:p>
         </p:txBody>
       </p:sp>
+      <p:sp>
+        <p:nvSpPr>
+          <p:cNvPr id="2" name="讲课提示"/>
+          <p:cNvSpPr txBox="1"/>
+          <p:nvPr/>
+        </p:nvSpPr>
+        <p:spPr>
+          <a:xfrm>
+            <a:off x="457200" y="457200"/>
+            <a:ext cx="6858000" cy="4800600"/>
+          </a:xfrm>
+          <a:prstGeom prst="rect">
+            <a:avLst/>
+          </a:prstGeom>
+        </p:spPr>
+        <p:txBody>
+          <a:bodyPr wrap="square"/>
+          <a:lstStyle/>
+          <a:p>
+            <a:r>
+              <a:rPr lang="zh-CN" dirty="0"/>
+              <a:t>第 99 节 · 登录、注销与注册三件套</a:t>
+            </a:r>
+          </a:p>
+          <a:p>
+            <a:r>
+              <a:rPr lang="zh-CN" dirty="0"/>
+              <a:t>单元 19 · 用户账户 · W25</a:t>
+            </a:r>
+          </a:p>
+          <a:p>
+            <a:r>
+              <a:rPr lang="zh-CN" dirty="0"/>
+              <a:t/>
+            </a:r>
+          </a:p>
+          <a:p>
+            <a:r>
+              <a:rPr lang="zh-CN" dirty="0"/>
+              <a:t>学习目标：会用 Django 自带的 auth 视图；会写注册页</a:t>
+            </a:r>
+          </a:p>
+          <a:p>
+            <a:r>
+              <a:rPr lang="zh-CN" dirty="0"/>
+              <a:t/>
+            </a:r>
+          </a:p>
+          <a:p>
+            <a:r>
+              <a:rPr lang="zh-CN" dirty="0"/>
+              <a:t>课堂实操（40 分钟，不看答案）：</a:t>
+            </a:r>
+          </a:p>
+          <a:p>
+            <a:r>
+              <a:rPr lang="zh-CN" dirty="0"/>
+              <a:t>· 实现登录与注销并测试</a:t>
+            </a:r>
+          </a:p>
+          <a:p>
+            <a:r>
+              <a:rPr lang="zh-CN" dirty="0"/>
+              <a:t>· 故意不注册 logout 的 URL 看会怎样</a:t>
+            </a:r>
+          </a:p>
+          <a:p>
+            <a:r>
+              <a:rPr lang="zh-CN" dirty="0"/>
+              <a:t/>
+            </a:r>
+          </a:p>
+          <a:p>
+            <a:r>
+              <a:rPr lang="zh-CN" dirty="0"/>
+              <a:t>课后作业：</a:t>
+            </a:r>
+          </a:p>
+          <a:p>
+            <a:r>
+              <a:rPr lang="zh-CN" dirty="0"/>
+              <a:t>· 产出：能注册登录的网站</a:t>
+            </a:r>
+          </a:p>
+          <a:p>
+            <a:r>
+              <a:rPr lang="zh-CN" dirty="0"/>
+              <a:t/>
+            </a:r>
+          </a:p>
+          <a:p>
+            <a:r>
+              <a:rPr lang="zh-CN" dirty="0"/>
+              <a:t>节奏：讲 20 分钟 → 学员自己敲 40 分钟（不看答案）→ 对讲评自查 20 分钟 → 写作业 10 分钟。</a:t>
+            </a:r>
+          </a:p>
+        </p:txBody>
+      </p:sp>
     </p:spTree>
   </p:cSld>
   <p:clrMapOvr>
@@ -1052,6 +1606,74 @@
           </a:p>
         </p:txBody>
       </p:sp>
+      <p:sp>
+        <p:nvSpPr>
+          <p:cNvPr id="2" name="讲课提示"/>
+          <p:cNvSpPr txBox="1"/>
+          <p:nvPr/>
+        </p:nvSpPr>
+        <p:spPr>
+          <a:xfrm>
+            <a:off x="457200" y="457200"/>
+            <a:ext cx="6858000" cy="4800600"/>
+          </a:xfrm>
+          <a:prstGeom prst="rect">
+            <a:avLst/>
+          </a:prstGeom>
+        </p:spPr>
+        <p:txBody>
+          <a:bodyPr wrap="square"/>
+          <a:lstStyle/>
+          <a:p>
+            <a:r>
+              <a:rPr lang="zh-CN" dirty="0"/>
+              <a:t>第 99 节 · 核心知识点：登录、注销与注册三件套</a:t>
+            </a:r>
+          </a:p>
+          <a:p>
+            <a:r>
+              <a:rPr lang="zh-CN" dirty="0"/>
+              <a:t/>
+            </a:r>
+          </a:p>
+          <a:p>
+            <a:r>
+              <a:rPr lang="zh-CN" dirty="0"/>
+              <a:t>讲这一页时：先让学生说出上节课的结论，再逐块讲要点。</a:t>
+            </a:r>
+          </a:p>
+          <a:p>
+            <a:r>
+              <a:rPr lang="zh-CN" dirty="0"/>
+              <a:t>每讲完一块，问一句「这一步如果写错了，报错会长什么样？」——把错误提前讲。</a:t>
+            </a:r>
+          </a:p>
+          <a:p>
+            <a:r>
+              <a:rPr lang="zh-CN" dirty="0"/>
+              <a:t/>
+            </a:r>
+          </a:p>
+          <a:p>
+            <a:r>
+              <a:rPr lang="zh-CN" dirty="0"/>
+              <a:t>本节目标：会用 Django 自带的 auth 视图；会写注册页</a:t>
+            </a:r>
+          </a:p>
+          <a:p>
+            <a:r>
+              <a:rPr lang="zh-CN" dirty="0"/>
+              <a:t/>
+            </a:r>
+          </a:p>
+          <a:p>
+            <a:r>
+              <a:rPr lang="zh-CN" dirty="0"/>
+              <a:t>看不到懂的地方，回讲义对应小节读一遍，再回来对着这页复述一次——能讲出来才算真懂。</a:t>
+            </a:r>
+          </a:p>
+        </p:txBody>
+      </p:sp>
     </p:spTree>
   </p:cSld>
   <p:clrMapOvr>
@@ -1175,6 +1797,104 @@
           </a:p>
         </p:txBody>
       </p:sp>
+      <p:sp>
+        <p:nvSpPr>
+          <p:cNvPr id="2" name="讲课提示"/>
+          <p:cNvSpPr txBox="1"/>
+          <p:nvPr/>
+        </p:nvSpPr>
+        <p:spPr>
+          <a:xfrm>
+            <a:off x="457200" y="457200"/>
+            <a:ext cx="6858000" cy="4800600"/>
+          </a:xfrm>
+          <a:prstGeom prst="rect">
+            <a:avLst/>
+          </a:prstGeom>
+        </p:spPr>
+        <p:txBody>
+          <a:bodyPr wrap="square"/>
+          <a:lstStyle/>
+          <a:p>
+            <a:r>
+              <a:rPr lang="zh-CN" dirty="0"/>
+              <a:t>第 100 节 · ★ @login_required 与数据隔离红线</a:t>
+            </a:r>
+          </a:p>
+          <a:p>
+            <a:r>
+              <a:rPr lang="zh-CN" dirty="0"/>
+              <a:t>单元 19 · 用户账户 · W25–W26</a:t>
+            </a:r>
+          </a:p>
+          <a:p>
+            <a:r>
+              <a:rPr lang="zh-CN" dirty="0"/>
+              <a:t/>
+            </a:r>
+          </a:p>
+          <a:p>
+            <a:r>
+              <a:rPr lang="zh-CN" dirty="0"/>
+              <a:t>学习目标：会用装饰器限制访问；理解 `filter(owner=request.user)` 为什么不能写 all()</a:t>
+            </a:r>
+          </a:p>
+          <a:p>
+            <a:r>
+              <a:rPr lang="zh-CN" dirty="0"/>
+              <a:t/>
+            </a:r>
+          </a:p>
+          <a:p>
+            <a:r>
+              <a:rPr lang="zh-CN" dirty="0"/>
+              <a:t>课堂实操（40 分钟，不看答案）：</a:t>
+            </a:r>
+          </a:p>
+          <a:p>
+            <a:r>
+              <a:rPr lang="zh-CN" dirty="0"/>
+              <a:t>· ★ 现场把 filter 改成 all()，用两个账号看数据串了</a:t>
+            </a:r>
+          </a:p>
+          <a:p>
+            <a:r>
+              <a:rPr lang="zh-CN" dirty="0"/>
+              <a:t>· 再改回 filter，验证隔离生效</a:t>
+            </a:r>
+          </a:p>
+          <a:p>
+            <a:r>
+              <a:rPr lang="zh-CN" dirty="0"/>
+              <a:t/>
+            </a:r>
+          </a:p>
+          <a:p>
+            <a:r>
+              <a:rPr lang="zh-CN" dirty="0"/>
+              <a:t>课后作业：</a:t>
+            </a:r>
+          </a:p>
+          <a:p>
+            <a:r>
+              <a:rPr lang="zh-CN" dirty="0"/>
+              <a:t>· ★ 产出：数据按用户隔离的网站</a:t>
+            </a:r>
+          </a:p>
+          <a:p>
+            <a:r>
+              <a:rPr lang="zh-CN" dirty="0"/>
+              <a:t/>
+            </a:r>
+          </a:p>
+          <a:p>
+            <a:r>
+              <a:rPr lang="zh-CN" dirty="0"/>
+              <a:t>节奏：讲 20 分钟 → 学员自己敲 40 分钟（不看答案）→ 对讲评自查 20 分钟 → 写作业 10 分钟。</a:t>
+            </a:r>
+          </a:p>
+        </p:txBody>
+      </p:sp>
     </p:spTree>
   </p:cSld>
   <p:clrMapOvr>
@@ -1268,6 +1988,74 @@
           </a:p>
         </p:txBody>
       </p:sp>
+      <p:sp>
+        <p:nvSpPr>
+          <p:cNvPr id="2" name="讲课提示"/>
+          <p:cNvSpPr txBox="1"/>
+          <p:nvPr/>
+        </p:nvSpPr>
+        <p:spPr>
+          <a:xfrm>
+            <a:off x="457200" y="457200"/>
+            <a:ext cx="6858000" cy="4800600"/>
+          </a:xfrm>
+          <a:prstGeom prst="rect">
+            <a:avLst/>
+          </a:prstGeom>
+        </p:spPr>
+        <p:txBody>
+          <a:bodyPr wrap="square"/>
+          <a:lstStyle/>
+          <a:p>
+            <a:r>
+              <a:rPr lang="zh-CN" dirty="0"/>
+              <a:t>第 100 节 · 核心知识点：★ @login_required 与数据隔离红线</a:t>
+            </a:r>
+          </a:p>
+          <a:p>
+            <a:r>
+              <a:rPr lang="zh-CN" dirty="0"/>
+              <a:t/>
+            </a:r>
+          </a:p>
+          <a:p>
+            <a:r>
+              <a:rPr lang="zh-CN" dirty="0"/>
+              <a:t>讲这一页时：先让学生说出上节课的结论，再逐块讲要点。</a:t>
+            </a:r>
+          </a:p>
+          <a:p>
+            <a:r>
+              <a:rPr lang="zh-CN" dirty="0"/>
+              <a:t>每讲完一块，问一句「这一步如果写错了，报错会长什么样？」——把错误提前讲。</a:t>
+            </a:r>
+          </a:p>
+          <a:p>
+            <a:r>
+              <a:rPr lang="zh-CN" dirty="0"/>
+              <a:t/>
+            </a:r>
+          </a:p>
+          <a:p>
+            <a:r>
+              <a:rPr lang="zh-CN" dirty="0"/>
+              <a:t>本节目标：会用装饰器限制访问；理解 `filter(owner=request.user)` 为什么不能写 all()</a:t>
+            </a:r>
+          </a:p>
+          <a:p>
+            <a:r>
+              <a:rPr lang="zh-CN" dirty="0"/>
+              <a:t/>
+            </a:r>
+          </a:p>
+          <a:p>
+            <a:r>
+              <a:rPr lang="zh-CN" dirty="0"/>
+              <a:t>看不到懂的地方，回讲义对应小节读一遍，再回来对着这页复述一次——能讲出来才算真懂。</a:t>
+            </a:r>
+          </a:p>
+        </p:txBody>
+      </p:sp>
     </p:spTree>
   </p:cSld>
   <p:clrMapOvr>
@@ -1391,6 +2179,104 @@
           </a:p>
         </p:txBody>
       </p:sp>
+      <p:sp>
+        <p:nvSpPr>
+          <p:cNvPr id="2" name="讲课提示"/>
+          <p:cNvSpPr txBox="1"/>
+          <p:nvPr/>
+        </p:nvSpPr>
+        <p:spPr>
+          <a:xfrm>
+            <a:off x="457200" y="457200"/>
+            <a:ext cx="6858000" cy="4800600"/>
+          </a:xfrm>
+          <a:prstGeom prst="rect">
+            <a:avLst/>
+          </a:prstGeom>
+        </p:spPr>
+        <p:txBody>
+          <a:bodyPr wrap="square"/>
+          <a:lstStyle/>
+          <a:p>
+            <a:r>
+              <a:rPr lang="zh-CN" dirty="0"/>
+              <a:t>第 101 节 · edit_entry 的双重保护</a:t>
+            </a:r>
+          </a:p>
+          <a:p>
+            <a:r>
+              <a:rPr lang="zh-CN" dirty="0"/>
+              <a:t>单元 19 · 用户账户 · W26</a:t>
+            </a:r>
+          </a:p>
+          <a:p>
+            <a:r>
+              <a:rPr lang="zh-CN" dirty="0"/>
+              <a:t/>
+            </a:r>
+          </a:p>
+          <a:p>
+            <a:r>
+              <a:rPr lang="zh-CN" dirty="0"/>
+              <a:t>学习目标：会同时校验条目所属主题与主题所属用户</a:t>
+            </a:r>
+          </a:p>
+          <a:p>
+            <a:r>
+              <a:rPr lang="zh-CN" dirty="0"/>
+              <a:t/>
+            </a:r>
+          </a:p>
+          <a:p>
+            <a:r>
+              <a:rPr lang="zh-CN" dirty="0"/>
+              <a:t>课堂实操（40 分钟，不看答案）：</a:t>
+            </a:r>
+          </a:p>
+          <a:p>
+            <a:r>
+              <a:rPr lang="zh-CN" dirty="0"/>
+              <a:t>· 实现双重校验</a:t>
+            </a:r>
+          </a:p>
+          <a:p>
+            <a:r>
+              <a:rPr lang="zh-CN" dirty="0"/>
+              <a:t>· 用一个账号去改另一个账号的条目，应被拒</a:t>
+            </a:r>
+          </a:p>
+          <a:p>
+            <a:r>
+              <a:rPr lang="zh-CN" dirty="0"/>
+              <a:t/>
+            </a:r>
+          </a:p>
+          <a:p>
+            <a:r>
+              <a:rPr lang="zh-CN" dirty="0"/>
+              <a:t>课后作业：</a:t>
+            </a:r>
+          </a:p>
+          <a:p>
+            <a:r>
+              <a:rPr lang="zh-CN" dirty="0"/>
+              <a:t>· 完成教材 19.3 全部动手练</a:t>
+            </a:r>
+          </a:p>
+          <a:p>
+            <a:r>
+              <a:rPr lang="zh-CN" dirty="0"/>
+              <a:t/>
+            </a:r>
+          </a:p>
+          <a:p>
+            <a:r>
+              <a:rPr lang="zh-CN" dirty="0"/>
+              <a:t>节奏：讲 20 分钟 → 学员自己敲 40 分钟（不看答案）→ 对讲评自查 20 分钟 → 写作业 10 分钟。</a:t>
+            </a:r>
+          </a:p>
+        </p:txBody>
+      </p:sp>
     </p:spTree>
   </p:cSld>
   <p:clrMapOvr>
@@ -1416,6 +2302,74 @@
           <a:chExt cx="0" cy="0"/>
         </a:xfrm>
       </p:grpSpPr>
+      <p:sp>
+        <p:nvSpPr>
+          <p:cNvPr id="2" name="讲课提示"/>
+          <p:cNvSpPr txBox="1"/>
+          <p:nvPr/>
+        </p:nvSpPr>
+        <p:spPr>
+          <a:xfrm>
+            <a:off x="457200" y="457200"/>
+            <a:ext cx="6858000" cy="4800600"/>
+          </a:xfrm>
+          <a:prstGeom prst="rect">
+            <a:avLst/>
+          </a:prstGeom>
+        </p:spPr>
+        <p:txBody>
+          <a:bodyPr wrap="square"/>
+          <a:lstStyle/>
+          <a:p>
+            <a:r>
+              <a:rPr lang="zh-CN" dirty="0"/>
+              <a:t>第 101 节 · 核心知识点：edit_entry 的双重保护</a:t>
+            </a:r>
+          </a:p>
+          <a:p>
+            <a:r>
+              <a:rPr lang="zh-CN" dirty="0"/>
+              <a:t/>
+            </a:r>
+          </a:p>
+          <a:p>
+            <a:r>
+              <a:rPr lang="zh-CN" dirty="0"/>
+              <a:t>讲这一页时：先让学生说出上节课的结论，再逐块讲要点。</a:t>
+            </a:r>
+          </a:p>
+          <a:p>
+            <a:r>
+              <a:rPr lang="zh-CN" dirty="0"/>
+              <a:t>每讲完一块，问一句「这一步如果写错了，报错会长什么样？」——把错误提前讲。</a:t>
+            </a:r>
+          </a:p>
+          <a:p>
+            <a:r>
+              <a:rPr lang="zh-CN" dirty="0"/>
+              <a:t/>
+            </a:r>
+          </a:p>
+          <a:p>
+            <a:r>
+              <a:rPr lang="zh-CN" dirty="0"/>
+              <a:t>本节目标：会同时校验条目所属主题与主题所属用户</a:t>
+            </a:r>
+          </a:p>
+          <a:p>
+            <a:r>
+              <a:rPr lang="zh-CN" dirty="0"/>
+              <a:t/>
+            </a:r>
+          </a:p>
+          <a:p>
+            <a:r>
+              <a:rPr lang="zh-CN" dirty="0"/>
+              <a:t>看不到懂的地方，回讲义对应小节读一遍，再回来对着这页复述一次——能讲出来才算真懂。</a:t>
+            </a:r>
+          </a:p>
+        </p:txBody>
+      </p:sp>
       <p:sp>
         <p:nvSpPr>
           <p:cNvPr id="2" name="讲课提示"/>

--- a/python-course-ppt/逐节课件/Python讲授课件-单元19.pptx
+++ b/python-course-ppt/逐节课件/Python讲授课件-单元19.pptx
@@ -238,2214 +238,6 @@
 </p:notesMaster>
 </file>
 
-<file path=ppt/notesSlides/notesSlide1.xml><?xml version="1.0" encoding="utf-8"?>
-<p:notes xmlns:a="http://schemas.openxmlformats.org/drawingml/2006/main" xmlns:p="http://schemas.openxmlformats.org/presentationml/2006/main" xmlns:r="http://schemas.openxmlformats.org/officeDocument/2006/relationships">
-  <p:cSld>
-    <p:spTree>
-      <p:nvGrpSpPr>
-        <p:cNvPr id="1" name=""/>
-        <p:cNvGrpSpPr/>
-        <p:nvPr/>
-      </p:nvGrpSpPr>
-      <p:grpSpPr>
-        <a:xfrm>
-          <a:off x="0" y="0"/>
-          <a:ext cx="0" cy="0"/>
-          <a:chOff x="0" y="0"/>
-          <a:chExt cx="0" cy="0"/>
-        </a:xfrm>
-      </p:grpSpPr>
-      <p:sp>
-        <p:nvSpPr>
-          <p:cNvPr id="2" name="讲课提示"/>
-          <p:cNvSpPr txBox="1"/>
-          <p:nvPr/>
-        </p:nvSpPr>
-        <p:spPr>
-          <a:xfrm>
-            <a:off x="457200" y="457200"/>
-            <a:ext cx="6858000" cy="4800600"/>
-          </a:xfrm>
-          <a:prstGeom prst="rect">
-            <a:avLst/>
-          </a:prstGeom>
-        </p:spPr>
-        <p:txBody>
-          <a:bodyPr wrap="square"/>
-          <a:lstStyle/>
-          <a:p>
-            <a:r>
-              <a:rPr lang="zh-CN" dirty="0"/>
-              <a:t>单元 19 · 单元 19 · 用户账户</a:t>
-            </a:r>
-          </a:p>
-          <a:p>
-            <a:r>
-              <a:rPr lang="zh-CN" dirty="0"/>
-              <a:t/>
-            </a:r>
-          </a:p>
-          <a:p>
-            <a:r>
-              <a:rPr lang="zh-CN" dirty="0"/>
-              <a:t>本单元包含以下课节：</a:t>
-            </a:r>
-          </a:p>
-          <a:p>
-            <a:r>
-              <a:rPr lang="zh-CN" dirty="0"/>
-              <a:t>· 第 98 节 表单与数据归属三段式</a:t>
-            </a:r>
-          </a:p>
-          <a:p>
-            <a:r>
-              <a:rPr lang="zh-CN" dirty="0"/>
-              <a:t>· 第 99 节 登录、注销与注册三件套</a:t>
-            </a:r>
-          </a:p>
-          <a:p>
-            <a:r>
-              <a:rPr lang="zh-CN" dirty="0"/>
-              <a:t>· 第 100 节 ★ @login_required 与数据隔离红线</a:t>
-            </a:r>
-          </a:p>
-          <a:p>
-            <a:r>
-              <a:rPr lang="zh-CN" dirty="0"/>
-              <a:t>· 第 101 节 edit_entry 的双重保护</a:t>
-            </a:r>
-          </a:p>
-          <a:p>
-            <a:r>
-              <a:rPr lang="zh-CN" dirty="0"/>
-              <a:t>· 第 102 节 动手实战、答案与验收复盘</a:t>
-            </a:r>
-          </a:p>
-          <a:p>
-            <a:r>
-              <a:rPr lang="zh-CN" dirty="0"/>
-              <a:t/>
-            </a:r>
-          </a:p>
-          <a:p>
-            <a:r>
-              <a:rPr lang="zh-CN" dirty="0"/>
-              <a:t>开场用 3 分钟讲清：这个单元学完能做出什么，最后会被关卡怎么验。</a:t>
-            </a:r>
-          </a:p>
-        </p:txBody>
-      </p:sp>
-      <p:sp>
-        <p:nvSpPr>
-          <p:cNvPr id="2" name="讲课提示"/>
-          <p:cNvSpPr txBox="1"/>
-          <p:nvPr/>
-        </p:nvSpPr>
-        <p:spPr>
-          <a:xfrm>
-            <a:off x="457200" y="457200"/>
-            <a:ext cx="6858000" cy="4800600"/>
-          </a:xfrm>
-          <a:prstGeom prst="rect">
-            <a:avLst/>
-          </a:prstGeom>
-        </p:spPr>
-        <p:txBody>
-          <a:bodyPr wrap="square"/>
-          <a:lstStyle/>
-          <a:p>
-            <a:r>
-              <a:rPr lang="zh-CN" dirty="0"/>
-              <a:t>单元 19 · 单元 19 · 用户账户</a:t>
-            </a:r>
-          </a:p>
-          <a:p>
-            <a:r>
-              <a:rPr lang="zh-CN" dirty="0"/>
-              <a:t/>
-            </a:r>
-          </a:p>
-          <a:p>
-            <a:r>
-              <a:rPr lang="zh-CN" dirty="0"/>
-              <a:t>本单元包含以下课节：</a:t>
-            </a:r>
-          </a:p>
-          <a:p>
-            <a:r>
-              <a:rPr lang="zh-CN" dirty="0"/>
-              <a:t>· 第 98 节 表单与数据归属三段式</a:t>
-            </a:r>
-          </a:p>
-          <a:p>
-            <a:r>
-              <a:rPr lang="zh-CN" dirty="0"/>
-              <a:t>· 第 99 节 登录、注销与注册三件套</a:t>
-            </a:r>
-          </a:p>
-          <a:p>
-            <a:r>
-              <a:rPr lang="zh-CN" dirty="0"/>
-              <a:t>· 第 100 节 ★ @login_required 与数据隔离红线</a:t>
-            </a:r>
-          </a:p>
-          <a:p>
-            <a:r>
-              <a:rPr lang="zh-CN" dirty="0"/>
-              <a:t>· 第 101 节 edit_entry 的双重保护</a:t>
-            </a:r>
-          </a:p>
-          <a:p>
-            <a:r>
-              <a:rPr lang="zh-CN" dirty="0"/>
-              <a:t>· 第 102 节 动手实战、答案与验收复盘</a:t>
-            </a:r>
-          </a:p>
-          <a:p>
-            <a:r>
-              <a:rPr lang="zh-CN" dirty="0"/>
-              <a:t/>
-            </a:r>
-          </a:p>
-          <a:p>
-            <a:r>
-              <a:rPr lang="zh-CN" dirty="0"/>
-              <a:t>开场用 3 分钟讲清：这个单元学完能做出什么，最后会被关卡怎么验。</a:t>
-            </a:r>
-          </a:p>
-        </p:txBody>
-      </p:sp>
-    </p:spTree>
-  </p:cSld>
-  <p:clrMapOvr>
-    <a:masterClrMapping/>
-  </p:clrMapOvr>
-</p:notes>
-</file>
-
-<file path=ppt/notesSlides/notesSlide10.xml><?xml version="1.0" encoding="utf-8"?>
-<p:notes xmlns:a="http://schemas.openxmlformats.org/drawingml/2006/main" xmlns:p="http://schemas.openxmlformats.org/presentationml/2006/main" xmlns:r="http://schemas.openxmlformats.org/officeDocument/2006/relationships">
-  <p:cSld>
-    <p:spTree>
-      <p:nvGrpSpPr>
-        <p:cNvPr id="1" name=""/>
-        <p:cNvGrpSpPr/>
-        <p:nvPr/>
-      </p:nvGrpSpPr>
-      <p:grpSpPr>
-        <a:xfrm>
-          <a:off x="0" y="0"/>
-          <a:ext cx="0" cy="0"/>
-          <a:chOff x="0" y="0"/>
-          <a:chExt cx="0" cy="0"/>
-        </a:xfrm>
-      </p:grpSpPr>
-      <p:sp>
-        <p:nvSpPr>
-          <p:cNvPr id="2" name="讲课提示"/>
-          <p:cNvSpPr txBox="1"/>
-          <p:nvPr/>
-        </p:nvSpPr>
-        <p:spPr>
-          <a:xfrm>
-            <a:off x="457200" y="457200"/>
-            <a:ext cx="6858000" cy="4800600"/>
-          </a:xfrm>
-          <a:prstGeom prst="rect">
-            <a:avLst/>
-          </a:prstGeom>
-        </p:spPr>
-        <p:txBody>
-          <a:bodyPr wrap="square"/>
-          <a:lstStyle/>
-          <a:p>
-            <a:r>
-              <a:rPr lang="zh-CN" dirty="0"/>
-              <a:t>第 102 节 · 动手实战、答案与验收复盘</a:t>
-            </a:r>
-          </a:p>
-          <a:p>
-            <a:r>
-              <a:rPr lang="zh-CN" dirty="0"/>
-              <a:t>单元 19 · 用户账户 · W26</a:t>
-            </a:r>
-          </a:p>
-          <a:p>
-            <a:r>
-              <a:rPr lang="zh-CN" dirty="0"/>
-              <a:t/>
-            </a:r>
-          </a:p>
-          <a:p>
-            <a:r>
-              <a:rPr lang="zh-CN" dirty="0"/>
-              <a:t>学习目标：独立完成单元 19 练习，守住数据隔离红线</a:t>
-            </a:r>
-          </a:p>
-          <a:p>
-            <a:r>
-              <a:rPr lang="zh-CN" dirty="0"/>
-              <a:t/>
-            </a:r>
-          </a:p>
-          <a:p>
-            <a:r>
-              <a:rPr lang="zh-CN" dirty="0"/>
-              <a:t>课堂实操（40 分钟，不看答案）：</a:t>
-            </a:r>
-          </a:p>
-          <a:p>
-            <a:r>
-              <a:rPr lang="zh-CN" dirty="0"/>
-              <a:t>· 限时 40 分钟独立完成基础档</a:t>
-            </a:r>
-          </a:p>
-          <a:p>
-            <a:r>
-              <a:rPr lang="zh-CN" dirty="0"/>
-              <a:t>· 逐条演示六、里的每个错误</a:t>
-            </a:r>
-          </a:p>
-          <a:p>
-            <a:r>
-              <a:rPr lang="zh-CN" dirty="0"/>
-              <a:t/>
-            </a:r>
-          </a:p>
-          <a:p>
-            <a:r>
-              <a:rPr lang="zh-CN" dirty="0"/>
-              <a:t>课后作业：</a:t>
-            </a:r>
-          </a:p>
-          <a:p>
-            <a:r>
-              <a:rPr lang="zh-CN" dirty="0"/>
-              <a:t>· ★ 产出：带注册登录的完整学习笔记</a:t>
-            </a:r>
-          </a:p>
-          <a:p>
-            <a:r>
-              <a:rPr lang="zh-CN" dirty="0"/>
-              <a:t/>
-            </a:r>
-          </a:p>
-          <a:p>
-            <a:r>
-              <a:rPr lang="zh-CN" dirty="0"/>
-              <a:t>节奏：讲 20 分钟 → 学员自己敲 40 分钟（不看答案）→ 对讲评自查 20 分钟 → 写作业 10 分钟。</a:t>
-            </a:r>
-          </a:p>
-        </p:txBody>
-      </p:sp>
-      <p:sp>
-        <p:nvSpPr>
-          <p:cNvPr id="2" name="讲课提示"/>
-          <p:cNvSpPr txBox="1"/>
-          <p:nvPr/>
-        </p:nvSpPr>
-        <p:spPr>
-          <a:xfrm>
-            <a:off x="457200" y="457200"/>
-            <a:ext cx="6858000" cy="4800600"/>
-          </a:xfrm>
-          <a:prstGeom prst="rect">
-            <a:avLst/>
-          </a:prstGeom>
-        </p:spPr>
-        <p:txBody>
-          <a:bodyPr wrap="square"/>
-          <a:lstStyle/>
-          <a:p>
-            <a:r>
-              <a:rPr lang="zh-CN" dirty="0"/>
-              <a:t>第 102 节 · 动手实战、答案与验收复盘</a:t>
-            </a:r>
-          </a:p>
-          <a:p>
-            <a:r>
-              <a:rPr lang="zh-CN" dirty="0"/>
-              <a:t>单元 19 · 用户账户 · W26</a:t>
-            </a:r>
-          </a:p>
-          <a:p>
-            <a:r>
-              <a:rPr lang="zh-CN" dirty="0"/>
-              <a:t/>
-            </a:r>
-          </a:p>
-          <a:p>
-            <a:r>
-              <a:rPr lang="zh-CN" dirty="0"/>
-              <a:t>学习目标：独立完成单元 19 练习，守住数据隔离红线</a:t>
-            </a:r>
-          </a:p>
-          <a:p>
-            <a:r>
-              <a:rPr lang="zh-CN" dirty="0"/>
-              <a:t/>
-            </a:r>
-          </a:p>
-          <a:p>
-            <a:r>
-              <a:rPr lang="zh-CN" dirty="0"/>
-              <a:t>课堂实操（40 分钟，不看答案）：</a:t>
-            </a:r>
-          </a:p>
-          <a:p>
-            <a:r>
-              <a:rPr lang="zh-CN" dirty="0"/>
-              <a:t>· 限时 40 分钟独立完成基础档</a:t>
-            </a:r>
-          </a:p>
-          <a:p>
-            <a:r>
-              <a:rPr lang="zh-CN" dirty="0"/>
-              <a:t>· 逐条演示六、里的每个错误</a:t>
-            </a:r>
-          </a:p>
-          <a:p>
-            <a:r>
-              <a:rPr lang="zh-CN" dirty="0"/>
-              <a:t/>
-            </a:r>
-          </a:p>
-          <a:p>
-            <a:r>
-              <a:rPr lang="zh-CN" dirty="0"/>
-              <a:t>课后作业：</a:t>
-            </a:r>
-          </a:p>
-          <a:p>
-            <a:r>
-              <a:rPr lang="zh-CN" dirty="0"/>
-              <a:t>· ★ 产出：带注册登录的完整学习笔记</a:t>
-            </a:r>
-          </a:p>
-          <a:p>
-            <a:r>
-              <a:rPr lang="zh-CN" dirty="0"/>
-              <a:t/>
-            </a:r>
-          </a:p>
-          <a:p>
-            <a:r>
-              <a:rPr lang="zh-CN" dirty="0"/>
-              <a:t>节奏：讲 20 分钟 → 学员自己敲 40 分钟（不看答案）→ 对讲评自查 20 分钟 → 写作业 10 分钟。</a:t>
-            </a:r>
-          </a:p>
-        </p:txBody>
-      </p:sp>
-    </p:spTree>
-  </p:cSld>
-  <p:clrMapOvr>
-    <a:masterClrMapping/>
-  </p:clrMapOvr>
-</p:notes>
-</file>
-
-<file path=ppt/notesSlides/notesSlide11.xml><?xml version="1.0" encoding="utf-8"?>
-<p:notes xmlns:a="http://schemas.openxmlformats.org/drawingml/2006/main" xmlns:p="http://schemas.openxmlformats.org/presentationml/2006/main" xmlns:r="http://schemas.openxmlformats.org/officeDocument/2006/relationships">
-  <p:cSld>
-    <p:spTree>
-      <p:nvGrpSpPr>
-        <p:cNvPr id="1" name=""/>
-        <p:cNvGrpSpPr/>
-        <p:nvPr/>
-      </p:nvGrpSpPr>
-      <p:grpSpPr>
-        <a:xfrm>
-          <a:off x="0" y="0"/>
-          <a:ext cx="0" cy="0"/>
-          <a:chOff x="0" y="0"/>
-          <a:chExt cx="0" cy="0"/>
-        </a:xfrm>
-      </p:grpSpPr>
-      <p:sp>
-        <p:nvSpPr>
-          <p:cNvPr id="2" name="讲课提示"/>
-          <p:cNvSpPr txBox="1"/>
-          <p:nvPr/>
-        </p:nvSpPr>
-        <p:spPr>
-          <a:xfrm>
-            <a:off x="457200" y="457200"/>
-            <a:ext cx="6858000" cy="4800600"/>
-          </a:xfrm>
-          <a:prstGeom prst="rect">
-            <a:avLst/>
-          </a:prstGeom>
-        </p:spPr>
-        <p:txBody>
-          <a:bodyPr wrap="square"/>
-          <a:lstStyle/>
-          <a:p>
-            <a:r>
-              <a:rPr lang="zh-CN" dirty="0"/>
-              <a:t>第 102 节 · 核心知识点：动手实战、答案与验收复盘</a:t>
-            </a:r>
-          </a:p>
-          <a:p>
-            <a:r>
-              <a:rPr lang="zh-CN" dirty="0"/>
-              <a:t/>
-            </a:r>
-          </a:p>
-          <a:p>
-            <a:r>
-              <a:rPr lang="zh-CN" dirty="0"/>
-              <a:t>讲这一页时：先让学生说出上节课的结论，再逐块讲要点。</a:t>
-            </a:r>
-          </a:p>
-          <a:p>
-            <a:r>
-              <a:rPr lang="zh-CN" dirty="0"/>
-              <a:t>每讲完一块，问一句「这一步如果写错了，报错会长什么样？」——把错误提前讲。</a:t>
-            </a:r>
-          </a:p>
-          <a:p>
-            <a:r>
-              <a:rPr lang="zh-CN" dirty="0"/>
-              <a:t/>
-            </a:r>
-          </a:p>
-          <a:p>
-            <a:r>
-              <a:rPr lang="zh-CN" dirty="0"/>
-              <a:t>本节目标：独立完成单元 19 练习，守住数据隔离红线</a:t>
-            </a:r>
-          </a:p>
-          <a:p>
-            <a:r>
-              <a:rPr lang="zh-CN" dirty="0"/>
-              <a:t/>
-            </a:r>
-          </a:p>
-          <a:p>
-            <a:r>
-              <a:rPr lang="zh-CN" dirty="0"/>
-              <a:t>看不到懂的地方，回讲义对应小节读一遍，再回来对着这页复述一次——能讲出来才算真懂。</a:t>
-            </a:r>
-          </a:p>
-        </p:txBody>
-      </p:sp>
-      <p:sp>
-        <p:nvSpPr>
-          <p:cNvPr id="2" name="讲课提示"/>
-          <p:cNvSpPr txBox="1"/>
-          <p:nvPr/>
-        </p:nvSpPr>
-        <p:spPr>
-          <a:xfrm>
-            <a:off x="457200" y="457200"/>
-            <a:ext cx="6858000" cy="4800600"/>
-          </a:xfrm>
-          <a:prstGeom prst="rect">
-            <a:avLst/>
-          </a:prstGeom>
-        </p:spPr>
-        <p:txBody>
-          <a:bodyPr wrap="square"/>
-          <a:lstStyle/>
-          <a:p>
-            <a:r>
-              <a:rPr lang="zh-CN" dirty="0"/>
-              <a:t>第 102 节 · 核心知识点：动手实战、答案与验收复盘</a:t>
-            </a:r>
-          </a:p>
-          <a:p>
-            <a:r>
-              <a:rPr lang="zh-CN" dirty="0"/>
-              <a:t/>
-            </a:r>
-          </a:p>
-          <a:p>
-            <a:r>
-              <a:rPr lang="zh-CN" dirty="0"/>
-              <a:t>讲这一页时：先让学生说出上节课的结论，再逐块讲要点。</a:t>
-            </a:r>
-          </a:p>
-          <a:p>
-            <a:r>
-              <a:rPr lang="zh-CN" dirty="0"/>
-              <a:t>每讲完一块，问一句「这一步如果写错了，报错会长什么样？」——把错误提前讲。</a:t>
-            </a:r>
-          </a:p>
-          <a:p>
-            <a:r>
-              <a:rPr lang="zh-CN" dirty="0"/>
-              <a:t/>
-            </a:r>
-          </a:p>
-          <a:p>
-            <a:r>
-              <a:rPr lang="zh-CN" dirty="0"/>
-              <a:t>本节目标：独立完成单元 19 练习，守住数据隔离红线</a:t>
-            </a:r>
-          </a:p>
-          <a:p>
-            <a:r>
-              <a:rPr lang="zh-CN" dirty="0"/>
-              <a:t/>
-            </a:r>
-          </a:p>
-          <a:p>
-            <a:r>
-              <a:rPr lang="zh-CN" dirty="0"/>
-              <a:t>看不到懂的地方，回讲义对应小节读一遍，再回来对着这页复述一次——能讲出来才算真懂。</a:t>
-            </a:r>
-          </a:p>
-        </p:txBody>
-      </p:sp>
-    </p:spTree>
-  </p:cSld>
-  <p:clrMapOvr>
-    <a:masterClrMapping/>
-  </p:clrMapOvr>
-</p:notes>
-</file>
-
-<file path=ppt/notesSlides/notesSlide12.xml><?xml version="1.0" encoding="utf-8"?>
-<p:notes xmlns:a="http://schemas.openxmlformats.org/drawingml/2006/main" xmlns:p="http://schemas.openxmlformats.org/presentationml/2006/main" xmlns:r="http://schemas.openxmlformats.org/officeDocument/2006/relationships">
-  <p:cSld>
-    <p:spTree>
-      <p:nvGrpSpPr>
-        <p:cNvPr id="1" name=""/>
-        <p:cNvGrpSpPr/>
-        <p:nvPr/>
-      </p:nvGrpSpPr>
-      <p:grpSpPr>
-        <a:xfrm>
-          <a:off x="0" y="0"/>
-          <a:ext cx="0" cy="0"/>
-          <a:chOff x="0" y="0"/>
-          <a:chExt cx="0" cy="0"/>
-        </a:xfrm>
-      </p:grpSpPr>
-      <p:sp>
-        <p:nvSpPr>
-          <p:cNvPr id="2" name="讲课提示"/>
-          <p:cNvSpPr txBox="1"/>
-          <p:nvPr/>
-        </p:nvSpPr>
-        <p:spPr>
-          <a:xfrm>
-            <a:off x="457200" y="457200"/>
-            <a:ext cx="6858000" cy="4800600"/>
-          </a:xfrm>
-          <a:prstGeom prst="rect">
-            <a:avLst/>
-          </a:prstGeom>
-        </p:spPr>
-        <p:txBody>
-          <a:bodyPr wrap="square"/>
-          <a:lstStyle/>
-          <a:p>
-            <a:r>
-              <a:rPr lang="zh-CN" dirty="0"/>
-              <a:t>单元 19 小结 · 单元 19 · 小结</a:t>
-            </a:r>
-          </a:p>
-          <a:p>
-            <a:r>
-              <a:rPr lang="zh-CN" dirty="0"/>
-              <a:t/>
-            </a:r>
-          </a:p>
-          <a:p>
-            <a:r>
-              <a:rPr lang="zh-CN" dirty="0"/>
-              <a:t>收尾动作：让学生合上讲义，口述本单元三个最重要的结论；说不出来的，回对应课节。</a:t>
-            </a:r>
-          </a:p>
-          <a:p>
-            <a:r>
-              <a:rPr lang="zh-CN" dirty="0"/>
-              <a:t>然后当场勾一遍本单元课节的「已完成」，没打勾的进下一单元前补掉。</a:t>
-            </a:r>
-          </a:p>
-        </p:txBody>
-      </p:sp>
-      <p:sp>
-        <p:nvSpPr>
-          <p:cNvPr id="2" name="讲课提示"/>
-          <p:cNvSpPr txBox="1"/>
-          <p:nvPr/>
-        </p:nvSpPr>
-        <p:spPr>
-          <a:xfrm>
-            <a:off x="457200" y="457200"/>
-            <a:ext cx="6858000" cy="4800600"/>
-          </a:xfrm>
-          <a:prstGeom prst="rect">
-            <a:avLst/>
-          </a:prstGeom>
-        </p:spPr>
-        <p:txBody>
-          <a:bodyPr wrap="square"/>
-          <a:lstStyle/>
-          <a:p>
-            <a:r>
-              <a:rPr lang="zh-CN" dirty="0"/>
-              <a:t>单元 19 小结 · 单元 19 · 小结</a:t>
-            </a:r>
-          </a:p>
-          <a:p>
-            <a:r>
-              <a:rPr lang="zh-CN" dirty="0"/>
-              <a:t/>
-            </a:r>
-          </a:p>
-          <a:p>
-            <a:r>
-              <a:rPr lang="zh-CN" dirty="0"/>
-              <a:t>收尾动作：让学生合上讲义，口述本单元三个最重要的结论；说不出来的，回对应课节。</a:t>
-            </a:r>
-          </a:p>
-          <a:p>
-            <a:r>
-              <a:rPr lang="zh-CN" dirty="0"/>
-              <a:t>然后当场勾一遍本单元课节的「已完成」，没打勾的进下一单元前补掉。</a:t>
-            </a:r>
-          </a:p>
-        </p:txBody>
-      </p:sp>
-    </p:spTree>
-  </p:cSld>
-  <p:clrMapOvr>
-    <a:masterClrMapping/>
-  </p:clrMapOvr>
-</p:notes>
-</file>
-
-<file path=ppt/notesSlides/notesSlide2.xml><?xml version="1.0" encoding="utf-8"?>
-<p:notes xmlns:a="http://schemas.openxmlformats.org/drawingml/2006/main" xmlns:p="http://schemas.openxmlformats.org/presentationml/2006/main" xmlns:r="http://schemas.openxmlformats.org/officeDocument/2006/relationships">
-  <p:cSld>
-    <p:spTree>
-      <p:nvGrpSpPr>
-        <p:cNvPr id="1" name=""/>
-        <p:cNvGrpSpPr/>
-        <p:nvPr/>
-      </p:nvGrpSpPr>
-      <p:grpSpPr>
-        <a:xfrm>
-          <a:off x="0" y="0"/>
-          <a:ext cx="0" cy="0"/>
-          <a:chOff x="0" y="0"/>
-          <a:chExt cx="0" cy="0"/>
-        </a:xfrm>
-      </p:grpSpPr>
-      <p:sp>
-        <p:nvSpPr>
-          <p:cNvPr id="2" name="讲课提示"/>
-          <p:cNvSpPr txBox="1"/>
-          <p:nvPr/>
-        </p:nvSpPr>
-        <p:spPr>
-          <a:xfrm>
-            <a:off x="457200" y="457200"/>
-            <a:ext cx="6858000" cy="4800600"/>
-          </a:xfrm>
-          <a:prstGeom prst="rect">
-            <a:avLst/>
-          </a:prstGeom>
-        </p:spPr>
-        <p:txBody>
-          <a:bodyPr wrap="square"/>
-          <a:lstStyle/>
-          <a:p>
-            <a:r>
-              <a:rPr lang="zh-CN" dirty="0"/>
-              <a:t>第 98 节 · 表单与数据归属三段式</a:t>
-            </a:r>
-          </a:p>
-          <a:p>
-            <a:r>
-              <a:rPr lang="zh-CN" dirty="0"/>
-              <a:t>单元 19 · 用户账户 · W25</a:t>
-            </a:r>
-          </a:p>
-          <a:p>
-            <a:r>
-              <a:rPr lang="zh-CN" dirty="0"/>
-              <a:t/>
-            </a:r>
-          </a:p>
-          <a:p>
-            <a:r>
-              <a:rPr lang="zh-CN" dirty="0"/>
-              <a:t>学习目标：会用 ModelForm；掌握 `is_valid → save(commit=False) → 补 owner → save`</a:t>
-            </a:r>
-          </a:p>
-          <a:p>
-            <a:r>
-              <a:rPr lang="zh-CN" dirty="0"/>
-              <a:t/>
-            </a:r>
-          </a:p>
-          <a:p>
-            <a:r>
-              <a:rPr lang="zh-CN" dirty="0"/>
-              <a:t>课堂实操（40 分钟，不看答案）：</a:t>
-            </a:r>
-          </a:p>
-          <a:p>
-            <a:r>
-              <a:rPr lang="zh-CN" dirty="0"/>
-              <a:t>· 实现一个 ModelForm 并渲染它</a:t>
-            </a:r>
-          </a:p>
-          <a:p>
-            <a:r>
-              <a:rPr lang="zh-CN" dirty="0"/>
-              <a:t>· 故意不补 owner，看数据归属错在哪</a:t>
-            </a:r>
-          </a:p>
-          <a:p>
-            <a:r>
-              <a:rPr lang="zh-CN" dirty="0"/>
-              <a:t/>
-            </a:r>
-          </a:p>
-          <a:p>
-            <a:r>
-              <a:rPr lang="zh-CN" dirty="0"/>
-              <a:t>课后作业：</a:t>
-            </a:r>
-          </a:p>
-          <a:p>
-            <a:r>
-              <a:rPr lang="zh-CN" dirty="0"/>
-              <a:t>· 完成教材 19.1 全部动手练</a:t>
-            </a:r>
-          </a:p>
-          <a:p>
-            <a:r>
-              <a:rPr lang="zh-CN" dirty="0"/>
-              <a:t/>
-            </a:r>
-          </a:p>
-          <a:p>
-            <a:r>
-              <a:rPr lang="zh-CN" dirty="0"/>
-              <a:t>节奏：讲 20 分钟 → 学员自己敲 40 分钟（不看答案）→ 对讲评自查 20 分钟 → 写作业 10 分钟。</a:t>
-            </a:r>
-          </a:p>
-        </p:txBody>
-      </p:sp>
-      <p:sp>
-        <p:nvSpPr>
-          <p:cNvPr id="2" name="讲课提示"/>
-          <p:cNvSpPr txBox="1"/>
-          <p:nvPr/>
-        </p:nvSpPr>
-        <p:spPr>
-          <a:xfrm>
-            <a:off x="457200" y="457200"/>
-            <a:ext cx="6858000" cy="4800600"/>
-          </a:xfrm>
-          <a:prstGeom prst="rect">
-            <a:avLst/>
-          </a:prstGeom>
-        </p:spPr>
-        <p:txBody>
-          <a:bodyPr wrap="square"/>
-          <a:lstStyle/>
-          <a:p>
-            <a:r>
-              <a:rPr lang="zh-CN" dirty="0"/>
-              <a:t>第 98 节 · 表单与数据归属三段式</a:t>
-            </a:r>
-          </a:p>
-          <a:p>
-            <a:r>
-              <a:rPr lang="zh-CN" dirty="0"/>
-              <a:t>单元 19 · 用户账户 · W25</a:t>
-            </a:r>
-          </a:p>
-          <a:p>
-            <a:r>
-              <a:rPr lang="zh-CN" dirty="0"/>
-              <a:t/>
-            </a:r>
-          </a:p>
-          <a:p>
-            <a:r>
-              <a:rPr lang="zh-CN" dirty="0"/>
-              <a:t>学习目标：会用 ModelForm；掌握 `is_valid → save(commit=False) → 补 owner → save`</a:t>
-            </a:r>
-          </a:p>
-          <a:p>
-            <a:r>
-              <a:rPr lang="zh-CN" dirty="0"/>
-              <a:t/>
-            </a:r>
-          </a:p>
-          <a:p>
-            <a:r>
-              <a:rPr lang="zh-CN" dirty="0"/>
-              <a:t>课堂实操（40 分钟，不看答案）：</a:t>
-            </a:r>
-          </a:p>
-          <a:p>
-            <a:r>
-              <a:rPr lang="zh-CN" dirty="0"/>
-              <a:t>· 实现一个 ModelForm 并渲染它</a:t>
-            </a:r>
-          </a:p>
-          <a:p>
-            <a:r>
-              <a:rPr lang="zh-CN" dirty="0"/>
-              <a:t>· 故意不补 owner，看数据归属错在哪</a:t>
-            </a:r>
-          </a:p>
-          <a:p>
-            <a:r>
-              <a:rPr lang="zh-CN" dirty="0"/>
-              <a:t/>
-            </a:r>
-          </a:p>
-          <a:p>
-            <a:r>
-              <a:rPr lang="zh-CN" dirty="0"/>
-              <a:t>课后作业：</a:t>
-            </a:r>
-          </a:p>
-          <a:p>
-            <a:r>
-              <a:rPr lang="zh-CN" dirty="0"/>
-              <a:t>· 完成教材 19.1 全部动手练</a:t>
-            </a:r>
-          </a:p>
-          <a:p>
-            <a:r>
-              <a:rPr lang="zh-CN" dirty="0"/>
-              <a:t/>
-            </a:r>
-          </a:p>
-          <a:p>
-            <a:r>
-              <a:rPr lang="zh-CN" dirty="0"/>
-              <a:t>节奏：讲 20 分钟 → 学员自己敲 40 分钟（不看答案）→ 对讲评自查 20 分钟 → 写作业 10 分钟。</a:t>
-            </a:r>
-          </a:p>
-        </p:txBody>
-      </p:sp>
-    </p:spTree>
-  </p:cSld>
-  <p:clrMapOvr>
-    <a:masterClrMapping/>
-  </p:clrMapOvr>
-</p:notes>
-</file>
-
-<file path=ppt/notesSlides/notesSlide3.xml><?xml version="1.0" encoding="utf-8"?>
-<p:notes xmlns:a="http://schemas.openxmlformats.org/drawingml/2006/main" xmlns:p="http://schemas.openxmlformats.org/presentationml/2006/main" xmlns:r="http://schemas.openxmlformats.org/officeDocument/2006/relationships">
-  <p:cSld>
-    <p:spTree>
-      <p:nvGrpSpPr>
-        <p:cNvPr id="1" name=""/>
-        <p:cNvGrpSpPr/>
-        <p:nvPr/>
-      </p:nvGrpSpPr>
-      <p:grpSpPr>
-        <a:xfrm>
-          <a:off x="0" y="0"/>
-          <a:ext cx="0" cy="0"/>
-          <a:chOff x="0" y="0"/>
-          <a:chExt cx="0" cy="0"/>
-        </a:xfrm>
-      </p:grpSpPr>
-      <p:sp>
-        <p:nvSpPr>
-          <p:cNvPr id="2" name="讲课提示"/>
-          <p:cNvSpPr txBox="1"/>
-          <p:nvPr/>
-        </p:nvSpPr>
-        <p:spPr>
-          <a:xfrm>
-            <a:off x="457200" y="457200"/>
-            <a:ext cx="6858000" cy="4800600"/>
-          </a:xfrm>
-          <a:prstGeom prst="rect">
-            <a:avLst/>
-          </a:prstGeom>
-        </p:spPr>
-        <p:txBody>
-          <a:bodyPr wrap="square"/>
-          <a:lstStyle/>
-          <a:p>
-            <a:r>
-              <a:rPr lang="zh-CN" dirty="0"/>
-              <a:t>第 98 节 · 核心知识点：表单与数据归属三段式</a:t>
-            </a:r>
-          </a:p>
-          <a:p>
-            <a:r>
-              <a:rPr lang="zh-CN" dirty="0"/>
-              <a:t/>
-            </a:r>
-          </a:p>
-          <a:p>
-            <a:r>
-              <a:rPr lang="zh-CN" dirty="0"/>
-              <a:t>讲这一页时：先让学生说出上节课的结论，再逐块讲要点。</a:t>
-            </a:r>
-          </a:p>
-          <a:p>
-            <a:r>
-              <a:rPr lang="zh-CN" dirty="0"/>
-              <a:t>每讲完一块，问一句「这一步如果写错了，报错会长什么样？」——把错误提前讲。</a:t>
-            </a:r>
-          </a:p>
-          <a:p>
-            <a:r>
-              <a:rPr lang="zh-CN" dirty="0"/>
-              <a:t/>
-            </a:r>
-          </a:p>
-          <a:p>
-            <a:r>
-              <a:rPr lang="zh-CN" dirty="0"/>
-              <a:t>本节目标：会用 ModelForm；掌握 `is_valid → save(commit=False) → 补 owner → save`</a:t>
-            </a:r>
-          </a:p>
-          <a:p>
-            <a:r>
-              <a:rPr lang="zh-CN" dirty="0"/>
-              <a:t/>
-            </a:r>
-          </a:p>
-          <a:p>
-            <a:r>
-              <a:rPr lang="zh-CN" dirty="0"/>
-              <a:t>看不到懂的地方，回讲义对应小节读一遍，再回来对着这页复述一次——能讲出来才算真懂。</a:t>
-            </a:r>
-          </a:p>
-        </p:txBody>
-      </p:sp>
-      <p:sp>
-        <p:nvSpPr>
-          <p:cNvPr id="2" name="讲课提示"/>
-          <p:cNvSpPr txBox="1"/>
-          <p:nvPr/>
-        </p:nvSpPr>
-        <p:spPr>
-          <a:xfrm>
-            <a:off x="457200" y="457200"/>
-            <a:ext cx="6858000" cy="4800600"/>
-          </a:xfrm>
-          <a:prstGeom prst="rect">
-            <a:avLst/>
-          </a:prstGeom>
-        </p:spPr>
-        <p:txBody>
-          <a:bodyPr wrap="square"/>
-          <a:lstStyle/>
-          <a:p>
-            <a:r>
-              <a:rPr lang="zh-CN" dirty="0"/>
-              <a:t>第 98 节 · 核心知识点：表单与数据归属三段式</a:t>
-            </a:r>
-          </a:p>
-          <a:p>
-            <a:r>
-              <a:rPr lang="zh-CN" dirty="0"/>
-              <a:t/>
-            </a:r>
-          </a:p>
-          <a:p>
-            <a:r>
-              <a:rPr lang="zh-CN" dirty="0"/>
-              <a:t>讲这一页时：先让学生说出上节课的结论，再逐块讲要点。</a:t>
-            </a:r>
-          </a:p>
-          <a:p>
-            <a:r>
-              <a:rPr lang="zh-CN" dirty="0"/>
-              <a:t>每讲完一块，问一句「这一步如果写错了，报错会长什么样？」——把错误提前讲。</a:t>
-            </a:r>
-          </a:p>
-          <a:p>
-            <a:r>
-              <a:rPr lang="zh-CN" dirty="0"/>
-              <a:t/>
-            </a:r>
-          </a:p>
-          <a:p>
-            <a:r>
-              <a:rPr lang="zh-CN" dirty="0"/>
-              <a:t>本节目标：会用 ModelForm；掌握 `is_valid → save(commit=False) → 补 owner → save`</a:t>
-            </a:r>
-          </a:p>
-          <a:p>
-            <a:r>
-              <a:rPr lang="zh-CN" dirty="0"/>
-              <a:t/>
-            </a:r>
-          </a:p>
-          <a:p>
-            <a:r>
-              <a:rPr lang="zh-CN" dirty="0"/>
-              <a:t>看不到懂的地方，回讲义对应小节读一遍，再回来对着这页复述一次——能讲出来才算真懂。</a:t>
-            </a:r>
-          </a:p>
-        </p:txBody>
-      </p:sp>
-    </p:spTree>
-  </p:cSld>
-  <p:clrMapOvr>
-    <a:masterClrMapping/>
-  </p:clrMapOvr>
-</p:notes>
-</file>
-
-<file path=ppt/notesSlides/notesSlide4.xml><?xml version="1.0" encoding="utf-8"?>
-<p:notes xmlns:a="http://schemas.openxmlformats.org/drawingml/2006/main" xmlns:p="http://schemas.openxmlformats.org/presentationml/2006/main" xmlns:r="http://schemas.openxmlformats.org/officeDocument/2006/relationships">
-  <p:cSld>
-    <p:spTree>
-      <p:nvGrpSpPr>
-        <p:cNvPr id="1" name=""/>
-        <p:cNvGrpSpPr/>
-        <p:nvPr/>
-      </p:nvGrpSpPr>
-      <p:grpSpPr>
-        <a:xfrm>
-          <a:off x="0" y="0"/>
-          <a:ext cx="0" cy="0"/>
-          <a:chOff x="0" y="0"/>
-          <a:chExt cx="0" cy="0"/>
-        </a:xfrm>
-      </p:grpSpPr>
-      <p:sp>
-        <p:nvSpPr>
-          <p:cNvPr id="2" name="讲课提示"/>
-          <p:cNvSpPr txBox="1"/>
-          <p:nvPr/>
-        </p:nvSpPr>
-        <p:spPr>
-          <a:xfrm>
-            <a:off x="457200" y="457200"/>
-            <a:ext cx="6858000" cy="4800600"/>
-          </a:xfrm>
-          <a:prstGeom prst="rect">
-            <a:avLst/>
-          </a:prstGeom>
-        </p:spPr>
-        <p:txBody>
-          <a:bodyPr wrap="square"/>
-          <a:lstStyle/>
-          <a:p>
-            <a:r>
-              <a:rPr lang="zh-CN" dirty="0"/>
-              <a:t>第 99 节 · 登录、注销与注册三件套</a:t>
-            </a:r>
-          </a:p>
-          <a:p>
-            <a:r>
-              <a:rPr lang="zh-CN" dirty="0"/>
-              <a:t>单元 19 · 用户账户 · W25</a:t>
-            </a:r>
-          </a:p>
-          <a:p>
-            <a:r>
-              <a:rPr lang="zh-CN" dirty="0"/>
-              <a:t/>
-            </a:r>
-          </a:p>
-          <a:p>
-            <a:r>
-              <a:rPr lang="zh-CN" dirty="0"/>
-              <a:t>学习目标：会用 Django 自带的 auth 视图；会写注册页</a:t>
-            </a:r>
-          </a:p>
-          <a:p>
-            <a:r>
-              <a:rPr lang="zh-CN" dirty="0"/>
-              <a:t/>
-            </a:r>
-          </a:p>
-          <a:p>
-            <a:r>
-              <a:rPr lang="zh-CN" dirty="0"/>
-              <a:t>课堂实操（40 分钟，不看答案）：</a:t>
-            </a:r>
-          </a:p>
-          <a:p>
-            <a:r>
-              <a:rPr lang="zh-CN" dirty="0"/>
-              <a:t>· 实现登录与注销并测试</a:t>
-            </a:r>
-          </a:p>
-          <a:p>
-            <a:r>
-              <a:rPr lang="zh-CN" dirty="0"/>
-              <a:t>· 故意不注册 logout 的 URL 看会怎样</a:t>
-            </a:r>
-          </a:p>
-          <a:p>
-            <a:r>
-              <a:rPr lang="zh-CN" dirty="0"/>
-              <a:t/>
-            </a:r>
-          </a:p>
-          <a:p>
-            <a:r>
-              <a:rPr lang="zh-CN" dirty="0"/>
-              <a:t>课后作业：</a:t>
-            </a:r>
-          </a:p>
-          <a:p>
-            <a:r>
-              <a:rPr lang="zh-CN" dirty="0"/>
-              <a:t>· 产出：能注册登录的网站</a:t>
-            </a:r>
-          </a:p>
-          <a:p>
-            <a:r>
-              <a:rPr lang="zh-CN" dirty="0"/>
-              <a:t/>
-            </a:r>
-          </a:p>
-          <a:p>
-            <a:r>
-              <a:rPr lang="zh-CN" dirty="0"/>
-              <a:t>节奏：讲 20 分钟 → 学员自己敲 40 分钟（不看答案）→ 对讲评自查 20 分钟 → 写作业 10 分钟。</a:t>
-            </a:r>
-          </a:p>
-        </p:txBody>
-      </p:sp>
-      <p:sp>
-        <p:nvSpPr>
-          <p:cNvPr id="2" name="讲课提示"/>
-          <p:cNvSpPr txBox="1"/>
-          <p:nvPr/>
-        </p:nvSpPr>
-        <p:spPr>
-          <a:xfrm>
-            <a:off x="457200" y="457200"/>
-            <a:ext cx="6858000" cy="4800600"/>
-          </a:xfrm>
-          <a:prstGeom prst="rect">
-            <a:avLst/>
-          </a:prstGeom>
-        </p:spPr>
-        <p:txBody>
-          <a:bodyPr wrap="square"/>
-          <a:lstStyle/>
-          <a:p>
-            <a:r>
-              <a:rPr lang="zh-CN" dirty="0"/>
-              <a:t>第 99 节 · 登录、注销与注册三件套</a:t>
-            </a:r>
-          </a:p>
-          <a:p>
-            <a:r>
-              <a:rPr lang="zh-CN" dirty="0"/>
-              <a:t>单元 19 · 用户账户 · W25</a:t>
-            </a:r>
-          </a:p>
-          <a:p>
-            <a:r>
-              <a:rPr lang="zh-CN" dirty="0"/>
-              <a:t/>
-            </a:r>
-          </a:p>
-          <a:p>
-            <a:r>
-              <a:rPr lang="zh-CN" dirty="0"/>
-              <a:t>学习目标：会用 Django 自带的 auth 视图；会写注册页</a:t>
-            </a:r>
-          </a:p>
-          <a:p>
-            <a:r>
-              <a:rPr lang="zh-CN" dirty="0"/>
-              <a:t/>
-            </a:r>
-          </a:p>
-          <a:p>
-            <a:r>
-              <a:rPr lang="zh-CN" dirty="0"/>
-              <a:t>课堂实操（40 分钟，不看答案）：</a:t>
-            </a:r>
-          </a:p>
-          <a:p>
-            <a:r>
-              <a:rPr lang="zh-CN" dirty="0"/>
-              <a:t>· 实现登录与注销并测试</a:t>
-            </a:r>
-          </a:p>
-          <a:p>
-            <a:r>
-              <a:rPr lang="zh-CN" dirty="0"/>
-              <a:t>· 故意不注册 logout 的 URL 看会怎样</a:t>
-            </a:r>
-          </a:p>
-          <a:p>
-            <a:r>
-              <a:rPr lang="zh-CN" dirty="0"/>
-              <a:t/>
-            </a:r>
-          </a:p>
-          <a:p>
-            <a:r>
-              <a:rPr lang="zh-CN" dirty="0"/>
-              <a:t>课后作业：</a:t>
-            </a:r>
-          </a:p>
-          <a:p>
-            <a:r>
-              <a:rPr lang="zh-CN" dirty="0"/>
-              <a:t>· 产出：能注册登录的网站</a:t>
-            </a:r>
-          </a:p>
-          <a:p>
-            <a:r>
-              <a:rPr lang="zh-CN" dirty="0"/>
-              <a:t/>
-            </a:r>
-          </a:p>
-          <a:p>
-            <a:r>
-              <a:rPr lang="zh-CN" dirty="0"/>
-              <a:t>节奏：讲 20 分钟 → 学员自己敲 40 分钟（不看答案）→ 对讲评自查 20 分钟 → 写作业 10 分钟。</a:t>
-            </a:r>
-          </a:p>
-        </p:txBody>
-      </p:sp>
-    </p:spTree>
-  </p:cSld>
-  <p:clrMapOvr>
-    <a:masterClrMapping/>
-  </p:clrMapOvr>
-</p:notes>
-</file>
-
-<file path=ppt/notesSlides/notesSlide5.xml><?xml version="1.0" encoding="utf-8"?>
-<p:notes xmlns:a="http://schemas.openxmlformats.org/drawingml/2006/main" xmlns:p="http://schemas.openxmlformats.org/presentationml/2006/main" xmlns:r="http://schemas.openxmlformats.org/officeDocument/2006/relationships">
-  <p:cSld>
-    <p:spTree>
-      <p:nvGrpSpPr>
-        <p:cNvPr id="1" name=""/>
-        <p:cNvGrpSpPr/>
-        <p:nvPr/>
-      </p:nvGrpSpPr>
-      <p:grpSpPr>
-        <a:xfrm>
-          <a:off x="0" y="0"/>
-          <a:ext cx="0" cy="0"/>
-          <a:chOff x="0" y="0"/>
-          <a:chExt cx="0" cy="0"/>
-        </a:xfrm>
-      </p:grpSpPr>
-      <p:sp>
-        <p:nvSpPr>
-          <p:cNvPr id="2" name="讲课提示"/>
-          <p:cNvSpPr txBox="1"/>
-          <p:nvPr/>
-        </p:nvSpPr>
-        <p:spPr>
-          <a:xfrm>
-            <a:off x="457200" y="457200"/>
-            <a:ext cx="6858000" cy="4800600"/>
-          </a:xfrm>
-          <a:prstGeom prst="rect">
-            <a:avLst/>
-          </a:prstGeom>
-        </p:spPr>
-        <p:txBody>
-          <a:bodyPr wrap="square"/>
-          <a:lstStyle/>
-          <a:p>
-            <a:r>
-              <a:rPr lang="zh-CN" dirty="0"/>
-              <a:t>第 99 节 · 核心知识点：登录、注销与注册三件套</a:t>
-            </a:r>
-          </a:p>
-          <a:p>
-            <a:r>
-              <a:rPr lang="zh-CN" dirty="0"/>
-              <a:t/>
-            </a:r>
-          </a:p>
-          <a:p>
-            <a:r>
-              <a:rPr lang="zh-CN" dirty="0"/>
-              <a:t>讲这一页时：先让学生说出上节课的结论，再逐块讲要点。</a:t>
-            </a:r>
-          </a:p>
-          <a:p>
-            <a:r>
-              <a:rPr lang="zh-CN" dirty="0"/>
-              <a:t>每讲完一块，问一句「这一步如果写错了，报错会长什么样？」——把错误提前讲。</a:t>
-            </a:r>
-          </a:p>
-          <a:p>
-            <a:r>
-              <a:rPr lang="zh-CN" dirty="0"/>
-              <a:t/>
-            </a:r>
-          </a:p>
-          <a:p>
-            <a:r>
-              <a:rPr lang="zh-CN" dirty="0"/>
-              <a:t>本节目标：会用 Django 自带的 auth 视图；会写注册页</a:t>
-            </a:r>
-          </a:p>
-          <a:p>
-            <a:r>
-              <a:rPr lang="zh-CN" dirty="0"/>
-              <a:t/>
-            </a:r>
-          </a:p>
-          <a:p>
-            <a:r>
-              <a:rPr lang="zh-CN" dirty="0"/>
-              <a:t>看不到懂的地方，回讲义对应小节读一遍，再回来对着这页复述一次——能讲出来才算真懂。</a:t>
-            </a:r>
-          </a:p>
-        </p:txBody>
-      </p:sp>
-      <p:sp>
-        <p:nvSpPr>
-          <p:cNvPr id="2" name="讲课提示"/>
-          <p:cNvSpPr txBox="1"/>
-          <p:nvPr/>
-        </p:nvSpPr>
-        <p:spPr>
-          <a:xfrm>
-            <a:off x="457200" y="457200"/>
-            <a:ext cx="6858000" cy="4800600"/>
-          </a:xfrm>
-          <a:prstGeom prst="rect">
-            <a:avLst/>
-          </a:prstGeom>
-        </p:spPr>
-        <p:txBody>
-          <a:bodyPr wrap="square"/>
-          <a:lstStyle/>
-          <a:p>
-            <a:r>
-              <a:rPr lang="zh-CN" dirty="0"/>
-              <a:t>第 99 节 · 核心知识点：登录、注销与注册三件套</a:t>
-            </a:r>
-          </a:p>
-          <a:p>
-            <a:r>
-              <a:rPr lang="zh-CN" dirty="0"/>
-              <a:t/>
-            </a:r>
-          </a:p>
-          <a:p>
-            <a:r>
-              <a:rPr lang="zh-CN" dirty="0"/>
-              <a:t>讲这一页时：先让学生说出上节课的结论，再逐块讲要点。</a:t>
-            </a:r>
-          </a:p>
-          <a:p>
-            <a:r>
-              <a:rPr lang="zh-CN" dirty="0"/>
-              <a:t>每讲完一块，问一句「这一步如果写错了，报错会长什么样？」——把错误提前讲。</a:t>
-            </a:r>
-          </a:p>
-          <a:p>
-            <a:r>
-              <a:rPr lang="zh-CN" dirty="0"/>
-              <a:t/>
-            </a:r>
-          </a:p>
-          <a:p>
-            <a:r>
-              <a:rPr lang="zh-CN" dirty="0"/>
-              <a:t>本节目标：会用 Django 自带的 auth 视图；会写注册页</a:t>
-            </a:r>
-          </a:p>
-          <a:p>
-            <a:r>
-              <a:rPr lang="zh-CN" dirty="0"/>
-              <a:t/>
-            </a:r>
-          </a:p>
-          <a:p>
-            <a:r>
-              <a:rPr lang="zh-CN" dirty="0"/>
-              <a:t>看不到懂的地方，回讲义对应小节读一遍，再回来对着这页复述一次——能讲出来才算真懂。</a:t>
-            </a:r>
-          </a:p>
-        </p:txBody>
-      </p:sp>
-    </p:spTree>
-  </p:cSld>
-  <p:clrMapOvr>
-    <a:masterClrMapping/>
-  </p:clrMapOvr>
-</p:notes>
-</file>
-
-<file path=ppt/notesSlides/notesSlide6.xml><?xml version="1.0" encoding="utf-8"?>
-<p:notes xmlns:a="http://schemas.openxmlformats.org/drawingml/2006/main" xmlns:p="http://schemas.openxmlformats.org/presentationml/2006/main" xmlns:r="http://schemas.openxmlformats.org/officeDocument/2006/relationships">
-  <p:cSld>
-    <p:spTree>
-      <p:nvGrpSpPr>
-        <p:cNvPr id="1" name=""/>
-        <p:cNvGrpSpPr/>
-        <p:nvPr/>
-      </p:nvGrpSpPr>
-      <p:grpSpPr>
-        <a:xfrm>
-          <a:off x="0" y="0"/>
-          <a:ext cx="0" cy="0"/>
-          <a:chOff x="0" y="0"/>
-          <a:chExt cx="0" cy="0"/>
-        </a:xfrm>
-      </p:grpSpPr>
-      <p:sp>
-        <p:nvSpPr>
-          <p:cNvPr id="2" name="讲课提示"/>
-          <p:cNvSpPr txBox="1"/>
-          <p:nvPr/>
-        </p:nvSpPr>
-        <p:spPr>
-          <a:xfrm>
-            <a:off x="457200" y="457200"/>
-            <a:ext cx="6858000" cy="4800600"/>
-          </a:xfrm>
-          <a:prstGeom prst="rect">
-            <a:avLst/>
-          </a:prstGeom>
-        </p:spPr>
-        <p:txBody>
-          <a:bodyPr wrap="square"/>
-          <a:lstStyle/>
-          <a:p>
-            <a:r>
-              <a:rPr lang="zh-CN" dirty="0"/>
-              <a:t>第 100 节 · ★ @login_required 与数据隔离红线</a:t>
-            </a:r>
-          </a:p>
-          <a:p>
-            <a:r>
-              <a:rPr lang="zh-CN" dirty="0"/>
-              <a:t>单元 19 · 用户账户 · W25–W26</a:t>
-            </a:r>
-          </a:p>
-          <a:p>
-            <a:r>
-              <a:rPr lang="zh-CN" dirty="0"/>
-              <a:t/>
-            </a:r>
-          </a:p>
-          <a:p>
-            <a:r>
-              <a:rPr lang="zh-CN" dirty="0"/>
-              <a:t>学习目标：会用装饰器限制访问；理解 `filter(owner=request.user)` 为什么不能写 all()</a:t>
-            </a:r>
-          </a:p>
-          <a:p>
-            <a:r>
-              <a:rPr lang="zh-CN" dirty="0"/>
-              <a:t/>
-            </a:r>
-          </a:p>
-          <a:p>
-            <a:r>
-              <a:rPr lang="zh-CN" dirty="0"/>
-              <a:t>课堂实操（40 分钟，不看答案）：</a:t>
-            </a:r>
-          </a:p>
-          <a:p>
-            <a:r>
-              <a:rPr lang="zh-CN" dirty="0"/>
-              <a:t>· ★ 现场把 filter 改成 all()，用两个账号看数据串了</a:t>
-            </a:r>
-          </a:p>
-          <a:p>
-            <a:r>
-              <a:rPr lang="zh-CN" dirty="0"/>
-              <a:t>· 再改回 filter，验证隔离生效</a:t>
-            </a:r>
-          </a:p>
-          <a:p>
-            <a:r>
-              <a:rPr lang="zh-CN" dirty="0"/>
-              <a:t/>
-            </a:r>
-          </a:p>
-          <a:p>
-            <a:r>
-              <a:rPr lang="zh-CN" dirty="0"/>
-              <a:t>课后作业：</a:t>
-            </a:r>
-          </a:p>
-          <a:p>
-            <a:r>
-              <a:rPr lang="zh-CN" dirty="0"/>
-              <a:t>· ★ 产出：数据按用户隔离的网站</a:t>
-            </a:r>
-          </a:p>
-          <a:p>
-            <a:r>
-              <a:rPr lang="zh-CN" dirty="0"/>
-              <a:t/>
-            </a:r>
-          </a:p>
-          <a:p>
-            <a:r>
-              <a:rPr lang="zh-CN" dirty="0"/>
-              <a:t>节奏：讲 20 分钟 → 学员自己敲 40 分钟（不看答案）→ 对讲评自查 20 分钟 → 写作业 10 分钟。</a:t>
-            </a:r>
-          </a:p>
-        </p:txBody>
-      </p:sp>
-      <p:sp>
-        <p:nvSpPr>
-          <p:cNvPr id="2" name="讲课提示"/>
-          <p:cNvSpPr txBox="1"/>
-          <p:nvPr/>
-        </p:nvSpPr>
-        <p:spPr>
-          <a:xfrm>
-            <a:off x="457200" y="457200"/>
-            <a:ext cx="6858000" cy="4800600"/>
-          </a:xfrm>
-          <a:prstGeom prst="rect">
-            <a:avLst/>
-          </a:prstGeom>
-        </p:spPr>
-        <p:txBody>
-          <a:bodyPr wrap="square"/>
-          <a:lstStyle/>
-          <a:p>
-            <a:r>
-              <a:rPr lang="zh-CN" dirty="0"/>
-              <a:t>第 100 节 · ★ @login_required 与数据隔离红线</a:t>
-            </a:r>
-          </a:p>
-          <a:p>
-            <a:r>
-              <a:rPr lang="zh-CN" dirty="0"/>
-              <a:t>单元 19 · 用户账户 · W25–W26</a:t>
-            </a:r>
-          </a:p>
-          <a:p>
-            <a:r>
-              <a:rPr lang="zh-CN" dirty="0"/>
-              <a:t/>
-            </a:r>
-          </a:p>
-          <a:p>
-            <a:r>
-              <a:rPr lang="zh-CN" dirty="0"/>
-              <a:t>学习目标：会用装饰器限制访问；理解 `filter(owner=request.user)` 为什么不能写 all()</a:t>
-            </a:r>
-          </a:p>
-          <a:p>
-            <a:r>
-              <a:rPr lang="zh-CN" dirty="0"/>
-              <a:t/>
-            </a:r>
-          </a:p>
-          <a:p>
-            <a:r>
-              <a:rPr lang="zh-CN" dirty="0"/>
-              <a:t>课堂实操（40 分钟，不看答案）：</a:t>
-            </a:r>
-          </a:p>
-          <a:p>
-            <a:r>
-              <a:rPr lang="zh-CN" dirty="0"/>
-              <a:t>· ★ 现场把 filter 改成 all()，用两个账号看数据串了</a:t>
-            </a:r>
-          </a:p>
-          <a:p>
-            <a:r>
-              <a:rPr lang="zh-CN" dirty="0"/>
-              <a:t>· 再改回 filter，验证隔离生效</a:t>
-            </a:r>
-          </a:p>
-          <a:p>
-            <a:r>
-              <a:rPr lang="zh-CN" dirty="0"/>
-              <a:t/>
-            </a:r>
-          </a:p>
-          <a:p>
-            <a:r>
-              <a:rPr lang="zh-CN" dirty="0"/>
-              <a:t>课后作业：</a:t>
-            </a:r>
-          </a:p>
-          <a:p>
-            <a:r>
-              <a:rPr lang="zh-CN" dirty="0"/>
-              <a:t>· ★ 产出：数据按用户隔离的网站</a:t>
-            </a:r>
-          </a:p>
-          <a:p>
-            <a:r>
-              <a:rPr lang="zh-CN" dirty="0"/>
-              <a:t/>
-            </a:r>
-          </a:p>
-          <a:p>
-            <a:r>
-              <a:rPr lang="zh-CN" dirty="0"/>
-              <a:t>节奏：讲 20 分钟 → 学员自己敲 40 分钟（不看答案）→ 对讲评自查 20 分钟 → 写作业 10 分钟。</a:t>
-            </a:r>
-          </a:p>
-        </p:txBody>
-      </p:sp>
-    </p:spTree>
-  </p:cSld>
-  <p:clrMapOvr>
-    <a:masterClrMapping/>
-  </p:clrMapOvr>
-</p:notes>
-</file>
-
-<file path=ppt/notesSlides/notesSlide7.xml><?xml version="1.0" encoding="utf-8"?>
-<p:notes xmlns:a="http://schemas.openxmlformats.org/drawingml/2006/main" xmlns:p="http://schemas.openxmlformats.org/presentationml/2006/main" xmlns:r="http://schemas.openxmlformats.org/officeDocument/2006/relationships">
-  <p:cSld>
-    <p:spTree>
-      <p:nvGrpSpPr>
-        <p:cNvPr id="1" name=""/>
-        <p:cNvGrpSpPr/>
-        <p:nvPr/>
-      </p:nvGrpSpPr>
-      <p:grpSpPr>
-        <a:xfrm>
-          <a:off x="0" y="0"/>
-          <a:ext cx="0" cy="0"/>
-          <a:chOff x="0" y="0"/>
-          <a:chExt cx="0" cy="0"/>
-        </a:xfrm>
-      </p:grpSpPr>
-      <p:sp>
-        <p:nvSpPr>
-          <p:cNvPr id="2" name="讲课提示"/>
-          <p:cNvSpPr txBox="1"/>
-          <p:nvPr/>
-        </p:nvSpPr>
-        <p:spPr>
-          <a:xfrm>
-            <a:off x="457200" y="457200"/>
-            <a:ext cx="6858000" cy="4800600"/>
-          </a:xfrm>
-          <a:prstGeom prst="rect">
-            <a:avLst/>
-          </a:prstGeom>
-        </p:spPr>
-        <p:txBody>
-          <a:bodyPr wrap="square"/>
-          <a:lstStyle/>
-          <a:p>
-            <a:r>
-              <a:rPr lang="zh-CN" dirty="0"/>
-              <a:t>第 100 节 · 核心知识点：★ @login_required 与数据隔离红线</a:t>
-            </a:r>
-          </a:p>
-          <a:p>
-            <a:r>
-              <a:rPr lang="zh-CN" dirty="0"/>
-              <a:t/>
-            </a:r>
-          </a:p>
-          <a:p>
-            <a:r>
-              <a:rPr lang="zh-CN" dirty="0"/>
-              <a:t>讲这一页时：先让学生说出上节课的结论，再逐块讲要点。</a:t>
-            </a:r>
-          </a:p>
-          <a:p>
-            <a:r>
-              <a:rPr lang="zh-CN" dirty="0"/>
-              <a:t>每讲完一块，问一句「这一步如果写错了，报错会长什么样？」——把错误提前讲。</a:t>
-            </a:r>
-          </a:p>
-          <a:p>
-            <a:r>
-              <a:rPr lang="zh-CN" dirty="0"/>
-              <a:t/>
-            </a:r>
-          </a:p>
-          <a:p>
-            <a:r>
-              <a:rPr lang="zh-CN" dirty="0"/>
-              <a:t>本节目标：会用装饰器限制访问；理解 `filter(owner=request.user)` 为什么不能写 all()</a:t>
-            </a:r>
-          </a:p>
-          <a:p>
-            <a:r>
-              <a:rPr lang="zh-CN" dirty="0"/>
-              <a:t/>
-            </a:r>
-          </a:p>
-          <a:p>
-            <a:r>
-              <a:rPr lang="zh-CN" dirty="0"/>
-              <a:t>看不到懂的地方，回讲义对应小节读一遍，再回来对着这页复述一次——能讲出来才算真懂。</a:t>
-            </a:r>
-          </a:p>
-        </p:txBody>
-      </p:sp>
-      <p:sp>
-        <p:nvSpPr>
-          <p:cNvPr id="2" name="讲课提示"/>
-          <p:cNvSpPr txBox="1"/>
-          <p:nvPr/>
-        </p:nvSpPr>
-        <p:spPr>
-          <a:xfrm>
-            <a:off x="457200" y="457200"/>
-            <a:ext cx="6858000" cy="4800600"/>
-          </a:xfrm>
-          <a:prstGeom prst="rect">
-            <a:avLst/>
-          </a:prstGeom>
-        </p:spPr>
-        <p:txBody>
-          <a:bodyPr wrap="square"/>
-          <a:lstStyle/>
-          <a:p>
-            <a:r>
-              <a:rPr lang="zh-CN" dirty="0"/>
-              <a:t>第 100 节 · 核心知识点：★ @login_required 与数据隔离红线</a:t>
-            </a:r>
-          </a:p>
-          <a:p>
-            <a:r>
-              <a:rPr lang="zh-CN" dirty="0"/>
-              <a:t/>
-            </a:r>
-          </a:p>
-          <a:p>
-            <a:r>
-              <a:rPr lang="zh-CN" dirty="0"/>
-              <a:t>讲这一页时：先让学生说出上节课的结论，再逐块讲要点。</a:t>
-            </a:r>
-          </a:p>
-          <a:p>
-            <a:r>
-              <a:rPr lang="zh-CN" dirty="0"/>
-              <a:t>每讲完一块，问一句「这一步如果写错了，报错会长什么样？」——把错误提前讲。</a:t>
-            </a:r>
-          </a:p>
-          <a:p>
-            <a:r>
-              <a:rPr lang="zh-CN" dirty="0"/>
-              <a:t/>
-            </a:r>
-          </a:p>
-          <a:p>
-            <a:r>
-              <a:rPr lang="zh-CN" dirty="0"/>
-              <a:t>本节目标：会用装饰器限制访问；理解 `filter(owner=request.user)` 为什么不能写 all()</a:t>
-            </a:r>
-          </a:p>
-          <a:p>
-            <a:r>
-              <a:rPr lang="zh-CN" dirty="0"/>
-              <a:t/>
-            </a:r>
-          </a:p>
-          <a:p>
-            <a:r>
-              <a:rPr lang="zh-CN" dirty="0"/>
-              <a:t>看不到懂的地方，回讲义对应小节读一遍，再回来对着这页复述一次——能讲出来才算真懂。</a:t>
-            </a:r>
-          </a:p>
-        </p:txBody>
-      </p:sp>
-    </p:spTree>
-  </p:cSld>
-  <p:clrMapOvr>
-    <a:masterClrMapping/>
-  </p:clrMapOvr>
-</p:notes>
-</file>
-
-<file path=ppt/notesSlides/notesSlide8.xml><?xml version="1.0" encoding="utf-8"?>
-<p:notes xmlns:a="http://schemas.openxmlformats.org/drawingml/2006/main" xmlns:p="http://schemas.openxmlformats.org/presentationml/2006/main" xmlns:r="http://schemas.openxmlformats.org/officeDocument/2006/relationships">
-  <p:cSld>
-    <p:spTree>
-      <p:nvGrpSpPr>
-        <p:cNvPr id="1" name=""/>
-        <p:cNvGrpSpPr/>
-        <p:nvPr/>
-      </p:nvGrpSpPr>
-      <p:grpSpPr>
-        <a:xfrm>
-          <a:off x="0" y="0"/>
-          <a:ext cx="0" cy="0"/>
-          <a:chOff x="0" y="0"/>
-          <a:chExt cx="0" cy="0"/>
-        </a:xfrm>
-      </p:grpSpPr>
-      <p:sp>
-        <p:nvSpPr>
-          <p:cNvPr id="2" name="讲课提示"/>
-          <p:cNvSpPr txBox="1"/>
-          <p:nvPr/>
-        </p:nvSpPr>
-        <p:spPr>
-          <a:xfrm>
-            <a:off x="457200" y="457200"/>
-            <a:ext cx="6858000" cy="4800600"/>
-          </a:xfrm>
-          <a:prstGeom prst="rect">
-            <a:avLst/>
-          </a:prstGeom>
-        </p:spPr>
-        <p:txBody>
-          <a:bodyPr wrap="square"/>
-          <a:lstStyle/>
-          <a:p>
-            <a:r>
-              <a:rPr lang="zh-CN" dirty="0"/>
-              <a:t>第 101 节 · edit_entry 的双重保护</a:t>
-            </a:r>
-          </a:p>
-          <a:p>
-            <a:r>
-              <a:rPr lang="zh-CN" dirty="0"/>
-              <a:t>单元 19 · 用户账户 · W26</a:t>
-            </a:r>
-          </a:p>
-          <a:p>
-            <a:r>
-              <a:rPr lang="zh-CN" dirty="0"/>
-              <a:t/>
-            </a:r>
-          </a:p>
-          <a:p>
-            <a:r>
-              <a:rPr lang="zh-CN" dirty="0"/>
-              <a:t>学习目标：会同时校验条目所属主题与主题所属用户</a:t>
-            </a:r>
-          </a:p>
-          <a:p>
-            <a:r>
-              <a:rPr lang="zh-CN" dirty="0"/>
-              <a:t/>
-            </a:r>
-          </a:p>
-          <a:p>
-            <a:r>
-              <a:rPr lang="zh-CN" dirty="0"/>
-              <a:t>课堂实操（40 分钟，不看答案）：</a:t>
-            </a:r>
-          </a:p>
-          <a:p>
-            <a:r>
-              <a:rPr lang="zh-CN" dirty="0"/>
-              <a:t>· 实现双重校验</a:t>
-            </a:r>
-          </a:p>
-          <a:p>
-            <a:r>
-              <a:rPr lang="zh-CN" dirty="0"/>
-              <a:t>· 用一个账号去改另一个账号的条目，应被拒</a:t>
-            </a:r>
-          </a:p>
-          <a:p>
-            <a:r>
-              <a:rPr lang="zh-CN" dirty="0"/>
-              <a:t/>
-            </a:r>
-          </a:p>
-          <a:p>
-            <a:r>
-              <a:rPr lang="zh-CN" dirty="0"/>
-              <a:t>课后作业：</a:t>
-            </a:r>
-          </a:p>
-          <a:p>
-            <a:r>
-              <a:rPr lang="zh-CN" dirty="0"/>
-              <a:t>· 完成教材 19.3 全部动手练</a:t>
-            </a:r>
-          </a:p>
-          <a:p>
-            <a:r>
-              <a:rPr lang="zh-CN" dirty="0"/>
-              <a:t/>
-            </a:r>
-          </a:p>
-          <a:p>
-            <a:r>
-              <a:rPr lang="zh-CN" dirty="0"/>
-              <a:t>节奏：讲 20 分钟 → 学员自己敲 40 分钟（不看答案）→ 对讲评自查 20 分钟 → 写作业 10 分钟。</a:t>
-            </a:r>
-          </a:p>
-        </p:txBody>
-      </p:sp>
-      <p:sp>
-        <p:nvSpPr>
-          <p:cNvPr id="2" name="讲课提示"/>
-          <p:cNvSpPr txBox="1"/>
-          <p:nvPr/>
-        </p:nvSpPr>
-        <p:spPr>
-          <a:xfrm>
-            <a:off x="457200" y="457200"/>
-            <a:ext cx="6858000" cy="4800600"/>
-          </a:xfrm>
-          <a:prstGeom prst="rect">
-            <a:avLst/>
-          </a:prstGeom>
-        </p:spPr>
-        <p:txBody>
-          <a:bodyPr wrap="square"/>
-          <a:lstStyle/>
-          <a:p>
-            <a:r>
-              <a:rPr lang="zh-CN" dirty="0"/>
-              <a:t>第 101 节 · edit_entry 的双重保护</a:t>
-            </a:r>
-          </a:p>
-          <a:p>
-            <a:r>
-              <a:rPr lang="zh-CN" dirty="0"/>
-              <a:t>单元 19 · 用户账户 · W26</a:t>
-            </a:r>
-          </a:p>
-          <a:p>
-            <a:r>
-              <a:rPr lang="zh-CN" dirty="0"/>
-              <a:t/>
-            </a:r>
-          </a:p>
-          <a:p>
-            <a:r>
-              <a:rPr lang="zh-CN" dirty="0"/>
-              <a:t>学习目标：会同时校验条目所属主题与主题所属用户</a:t>
-            </a:r>
-          </a:p>
-          <a:p>
-            <a:r>
-              <a:rPr lang="zh-CN" dirty="0"/>
-              <a:t/>
-            </a:r>
-          </a:p>
-          <a:p>
-            <a:r>
-              <a:rPr lang="zh-CN" dirty="0"/>
-              <a:t>课堂实操（40 分钟，不看答案）：</a:t>
-            </a:r>
-          </a:p>
-          <a:p>
-            <a:r>
-              <a:rPr lang="zh-CN" dirty="0"/>
-              <a:t>· 实现双重校验</a:t>
-            </a:r>
-          </a:p>
-          <a:p>
-            <a:r>
-              <a:rPr lang="zh-CN" dirty="0"/>
-              <a:t>· 用一个账号去改另一个账号的条目，应被拒</a:t>
-            </a:r>
-          </a:p>
-          <a:p>
-            <a:r>
-              <a:rPr lang="zh-CN" dirty="0"/>
-              <a:t/>
-            </a:r>
-          </a:p>
-          <a:p>
-            <a:r>
-              <a:rPr lang="zh-CN" dirty="0"/>
-              <a:t>课后作业：</a:t>
-            </a:r>
-          </a:p>
-          <a:p>
-            <a:r>
-              <a:rPr lang="zh-CN" dirty="0"/>
-              <a:t>· 完成教材 19.3 全部动手练</a:t>
-            </a:r>
-          </a:p>
-          <a:p>
-            <a:r>
-              <a:rPr lang="zh-CN" dirty="0"/>
-              <a:t/>
-            </a:r>
-          </a:p>
-          <a:p>
-            <a:r>
-              <a:rPr lang="zh-CN" dirty="0"/>
-              <a:t>节奏：讲 20 分钟 → 学员自己敲 40 分钟（不看答案）→ 对讲评自查 20 分钟 → 写作业 10 分钟。</a:t>
-            </a:r>
-          </a:p>
-        </p:txBody>
-      </p:sp>
-    </p:spTree>
-  </p:cSld>
-  <p:clrMapOvr>
-    <a:masterClrMapping/>
-  </p:clrMapOvr>
-</p:notes>
-</file>
-
-<file path=ppt/notesSlides/notesSlide9.xml><?xml version="1.0" encoding="utf-8"?>
-<p:notes xmlns:a="http://schemas.openxmlformats.org/drawingml/2006/main" xmlns:p="http://schemas.openxmlformats.org/presentationml/2006/main" xmlns:r="http://schemas.openxmlformats.org/officeDocument/2006/relationships">
-  <p:cSld>
-    <p:spTree>
-      <p:nvGrpSpPr>
-        <p:cNvPr id="1" name=""/>
-        <p:cNvGrpSpPr/>
-        <p:nvPr/>
-      </p:nvGrpSpPr>
-      <p:grpSpPr>
-        <a:xfrm>
-          <a:off x="0" y="0"/>
-          <a:ext cx="0" cy="0"/>
-          <a:chOff x="0" y="0"/>
-          <a:chExt cx="0" cy="0"/>
-        </a:xfrm>
-      </p:grpSpPr>
-      <p:sp>
-        <p:nvSpPr>
-          <p:cNvPr id="2" name="讲课提示"/>
-          <p:cNvSpPr txBox="1"/>
-          <p:nvPr/>
-        </p:nvSpPr>
-        <p:spPr>
-          <a:xfrm>
-            <a:off x="457200" y="457200"/>
-            <a:ext cx="6858000" cy="4800600"/>
-          </a:xfrm>
-          <a:prstGeom prst="rect">
-            <a:avLst/>
-          </a:prstGeom>
-        </p:spPr>
-        <p:txBody>
-          <a:bodyPr wrap="square"/>
-          <a:lstStyle/>
-          <a:p>
-            <a:r>
-              <a:rPr lang="zh-CN" dirty="0"/>
-              <a:t>第 101 节 · 核心知识点：edit_entry 的双重保护</a:t>
-            </a:r>
-          </a:p>
-          <a:p>
-            <a:r>
-              <a:rPr lang="zh-CN" dirty="0"/>
-              <a:t/>
-            </a:r>
-          </a:p>
-          <a:p>
-            <a:r>
-              <a:rPr lang="zh-CN" dirty="0"/>
-              <a:t>讲这一页时：先让学生说出上节课的结论，再逐块讲要点。</a:t>
-            </a:r>
-          </a:p>
-          <a:p>
-            <a:r>
-              <a:rPr lang="zh-CN" dirty="0"/>
-              <a:t>每讲完一块，问一句「这一步如果写错了，报错会长什么样？」——把错误提前讲。</a:t>
-            </a:r>
-          </a:p>
-          <a:p>
-            <a:r>
-              <a:rPr lang="zh-CN" dirty="0"/>
-              <a:t/>
-            </a:r>
-          </a:p>
-          <a:p>
-            <a:r>
-              <a:rPr lang="zh-CN" dirty="0"/>
-              <a:t>本节目标：会同时校验条目所属主题与主题所属用户</a:t>
-            </a:r>
-          </a:p>
-          <a:p>
-            <a:r>
-              <a:rPr lang="zh-CN" dirty="0"/>
-              <a:t/>
-            </a:r>
-          </a:p>
-          <a:p>
-            <a:r>
-              <a:rPr lang="zh-CN" dirty="0"/>
-              <a:t>看不到懂的地方，回讲义对应小节读一遍，再回来对着这页复述一次——能讲出来才算真懂。</a:t>
-            </a:r>
-          </a:p>
-        </p:txBody>
-      </p:sp>
-      <p:sp>
-        <p:nvSpPr>
-          <p:cNvPr id="2" name="讲课提示"/>
-          <p:cNvSpPr txBox="1"/>
-          <p:nvPr/>
-        </p:nvSpPr>
-        <p:spPr>
-          <a:xfrm>
-            <a:off x="457200" y="457200"/>
-            <a:ext cx="6858000" cy="4800600"/>
-          </a:xfrm>
-          <a:prstGeom prst="rect">
-            <a:avLst/>
-          </a:prstGeom>
-        </p:spPr>
-        <p:txBody>
-          <a:bodyPr wrap="square"/>
-          <a:lstStyle/>
-          <a:p>
-            <a:r>
-              <a:rPr lang="zh-CN" dirty="0"/>
-              <a:t>第 101 节 · 核心知识点：edit_entry 的双重保护</a:t>
-            </a:r>
-          </a:p>
-          <a:p>
-            <a:r>
-              <a:rPr lang="zh-CN" dirty="0"/>
-              <a:t/>
-            </a:r>
-          </a:p>
-          <a:p>
-            <a:r>
-              <a:rPr lang="zh-CN" dirty="0"/>
-              <a:t>讲这一页时：先让学生说出上节课的结论，再逐块讲要点。</a:t>
-            </a:r>
-          </a:p>
-          <a:p>
-            <a:r>
-              <a:rPr lang="zh-CN" dirty="0"/>
-              <a:t>每讲完一块，问一句「这一步如果写错了，报错会长什么样？」——把错误提前讲。</a:t>
-            </a:r>
-          </a:p>
-          <a:p>
-            <a:r>
-              <a:rPr lang="zh-CN" dirty="0"/>
-              <a:t/>
-            </a:r>
-          </a:p>
-          <a:p>
-            <a:r>
-              <a:rPr lang="zh-CN" dirty="0"/>
-              <a:t>本节目标：会同时校验条目所属主题与主题所属用户</a:t>
-            </a:r>
-          </a:p>
-          <a:p>
-            <a:r>
-              <a:rPr lang="zh-CN" dirty="0"/>
-              <a:t/>
-            </a:r>
-          </a:p>
-          <a:p>
-            <a:r>
-              <a:rPr lang="zh-CN" dirty="0"/>
-              <a:t>看不到懂的地方，回讲义对应小节读一遍，再回来对着这页复述一次——能讲出来才算真懂。</a:t>
-            </a:r>
-          </a:p>
-        </p:txBody>
-      </p:sp>
-    </p:spTree>
-  </p:cSld>
-  <p:clrMapOvr>
-    <a:masterClrMapping/>
-  </p:clrMapOvr>
-</p:notes>
-</file>
-
 <file path=ppt/slideLayouts/slideLayout1.xml><?xml version="1.0" encoding="utf-8"?>
 <p:sldLayout xmlns:p="http://schemas.openxmlformats.org/presentationml/2006/main" xmlns:a="http://schemas.openxmlformats.org/drawingml/2006/main">
   <p:cSld name="DEFAULT">
@@ -2763,7 +555,7 @@
   <p:cSld>
     <p:spTree>
       <p:nvGrpSpPr>
-        <p:cNvPr id="1" name="" descr="&lt;Slide style={{ width: '1280px', height: '720px', backgroundColor: '#FAFCFE', padding: 0, position: 'relative', overflow: 'hidden' }}&gt;&#13;&#10;    &lt;Box style={{ position: 'absolute', left: 0, top: 0, width: '1280px', height: '150px', background: '#1F5FA8' }} /&gt;&#13;&#10;    &lt;Box style={{ position: 'absolute', left: 64, top: 34, width: '1152px', flexDirection: 'column' }}&gt;&#13;&#10;        &lt;Text style={{ fontSize: 15, fontWeight: 'bold', color: '#BFD9F2', letterSpacing: 2 }}&gt;阶段 2 · 单元 19&lt;/Text&gt;&#13;&#10;        &lt;Text style={{ fontSize: 38, fontWeight: 'bold', color: '#FFFFFF', marginTop: 6 }}&gt;用户账户&lt;/Text&gt;&#13;&#10;    &lt;/Box&gt;&#13;&#10;    &lt;Box style={{ position: 'absolute', left: 64, top: 168, width: '1152px', height: 470 }}&gt;&#13;&#10;        &lt;svg width='1152' height='470' viewBox='0 0 1152 470'&gt;&#13;&#10;            &lt;text x='0' y='18' fontSize='15' fontWeight='bold' fill='#16232E' fontFamily='Microsoft YaHei'&gt;本单元共 5 节课&lt;/text&gt;&#13;&#10;            &lt;rect x='0' y='196' width='1152' height='38' rx='7' fill='#FFFFFF' /&gt;&lt;text x='16' y='221' fontSize='15' fontWeight='bold' fill='#1F5FA8' fontFamily='Microsoft YaHei'&gt;第 98 节&lt;/text&gt;&lt;text x='96' y='221' fontSize='15' fill='#16232E' fontFamily='Microsoft YaHei'&gt;表单与数据归属三段式&lt;/text&gt;&lt;text x='1080' y='221' fontSize='13' fill='#5A6B7A' textAnchor='end' fontFamily='Microsoft YaHei'&gt;W25&lt;/text&gt;&lt;rect x='0' y='238' width='1152' height='38' rx='7' fill='#F2F7FD' /&gt;&lt;text x='16' y='263' fontSize='15' fontWeight='bold' fill='#1F5FA8' fontFamily='Microsoft YaHei'&gt;第 99 节&lt;/text&gt;&lt;text x='96' y='263' fontSize='15' fill='#16232E' fontFamily='Microsoft YaHei'&gt;登录、注销与注册三件套&lt;/text&gt;&lt;text x='1080' y='263' fontSize='13' fill='#5A6B7A' textAnchor='end' fontFamily='Microsoft YaHei'&gt;W25&lt;/text&gt;&lt;rect x='0' y='280' width='1152' height='38' rx='7' fill='#FFFFFF' /&gt;&lt;text x='16' y='305' fontSize='15' fontWeight='bold' fill='#1F5FA8' fontFamily='Microsoft YaHei'&gt;第 100 节&lt;/text&gt;&lt;text x='96' y='305' fontSize='15' fill='#16232E' fontFamily='Microsoft YaHei'&gt;★ @login_required 与数据隔离红线&lt;/text&gt;&lt;text x='1080' y='305' fontSize='13' fill='#5A6B7A' textAnchor='end' fontFamily='Microsoft YaHei'&gt;W25&lt;/text&gt;&lt;rect x='0' y='322' width='1152' height='38' rx='7' fill='#F2F7FD' /&gt;&lt;text x='16' y='347' fontSize='15' fontWeight='bold' fill='#1F5FA8' fontFamily='Microsoft YaHei'&gt;第 101 节&lt;/text&gt;&lt;text x='96' y='347' fontSize='15' fill='#16232E' fontFamily='Microsoft YaHei'&gt;edit_entry 的双重保护&lt;/text&gt;&lt;text x='1080' y='347' fontSize='13' fill='#5A6B7A' textAnchor='end' fontFamily='Microsoft YaHei'&gt;W25&lt;/text&gt;&lt;rect x='0' y='364' width='1152' height='38' rx='7' fill='#FFFFFF' /&gt;&lt;text x='16' y='389' fontSize='15' fontWeight='bold' fill='#1F5FA8' fontFamily='Microsoft YaHei'&gt;第 102 节&lt;/text&gt;&lt;text x='96' y='389' fontSize='15' fill='#16232E' fontFamily='Microsoft YaHei'&gt;动手实战、答案与验收复盘&lt;/text&gt;&lt;text x='1080' y='389' fontSize='13' fill='#5A6B7A' textAnchor='end' fontFamily='Microsoft YaHei'&gt;W25&lt;/text&gt;&#13;&#10;        &lt;/svg&gt;&#13;&#10;    &lt;/Box&gt;&#13;&#10;    &lt;Box style={{ position: 'absolute', left: 64, bottom: 22, width: '1152px', flexDirection: 'row', justifyContent: 'space-between' }}&gt;&#13;&#10;        &lt;Text style={{ fontSize: 13, color: '#8A9AAA' }}&gt;Python 讲授课件 · 逐节版&lt;/Text&gt;&#13;&#10;        &lt;Text style={{ fontSize: 13, color: '#8A9AAA' }}&gt;单元 19 · 封面&lt;/Text&gt;&#13;&#10;    &lt;/Box&gt;&#13;&#10;&lt;/Slide&gt;&#13;&#10;"/>
+        <p:cNvPr id="1" name="" descr="&lt;Slide style={{ width: '1280px', height: '720px', backgroundColor: '#FAFCFE', padding: 0, position: 'relative', overflow: 'hidden' }}&gt;&#13;&#10;    &lt;Box style={{ position: 'absolute', left: 0, top: 0, width: '1280px', height: '150px', background: '#1F5FA8' }} /&gt;&#13;&#10;    &lt;Box style={{ position: 'absolute', left: 64, top: 34, width: '1152px', flexDirection: 'column' }}&gt;&#13;&#10;        &lt;Text style={{ fontSize: 15, fontWeight: 'bold', color: '#BFD9F2', letterSpacing: 2 }}&gt;阶段 2 · 单元 19&lt;/Text&gt;&#13;&#10;        &lt;Text style={{ fontSize: 38, fontWeight: 'bold', color: '#FFFFFF', marginTop: 6 }}&gt;用户账户&lt;/Text&gt;&#13;&#10;    &lt;/Box&gt;&#13;&#10;    &lt;Box style={{ position: 'absolute', left: 64, top: 168, width: '1152px', height: 470 }}&gt;&#13;&#10;        &lt;svg width='1152' height='470' viewBox='0 0 1152 470'&gt;&#13;&#10;            &lt;text x='0' y='18' fontSize='15' fontWeight='bold' fill='#16232E' fontFamily='Microsoft YaHei'&gt;本单元共 5 节课&lt;/text&gt;&#13;&#10;            &lt;rect x='0' y='56.0' width='1152' height='48.0' rx='7' fill='#FFFFFF' /&gt;&lt;text x='16' y='85.0' fontSize='15' fontWeight='bold' fill='#1F5FA8' fontFamily='Microsoft YaHei'&gt;第 98 节&lt;/text&gt;&lt;text x='96' y='85.0' fontSize='15' fill='#16232E' fontFamily='Microsoft YaHei'&gt;表单与数据归属三段式&lt;/text&gt;&lt;text x='1080' y='85.0' fontSize='13' fill='#5A6B7A' textAnchor='end' fontFamily='Microsoft YaHei'&gt;W25&lt;/text&gt;&lt;rect x='0' y='135.2' width='1152' height='48.0' rx='7' fill='#F2F7FD' /&gt;&lt;text x='16' y='164.2' fontSize='15' fontWeight='bold' fill='#1F5FA8' fontFamily='Microsoft YaHei'&gt;第 99 节&lt;/text&gt;&lt;text x='96' y='164.2' fontSize='15' fill='#16232E' fontFamily='Microsoft YaHei'&gt;登录、注销与注册三件套&lt;/text&gt;&lt;text x='1080' y='164.2' fontSize='13' fill='#5A6B7A' textAnchor='end' fontFamily='Microsoft YaHei'&gt;W25&lt;/text&gt;&lt;rect x='0' y='214.4' width='1152' height='48.0' rx='7' fill='#FFFFFF' /&gt;&lt;text x='16' y='243.4' fontSize='15' fontWeight='bold' fill='#1F5FA8' fontFamily='Microsoft YaHei'&gt;第 100 节&lt;/text&gt;&lt;text x='96' y='243.4' fontSize='15' fill='#16232E' fontFamily='Microsoft YaHei'&gt;★ @login_required 与数据隔离红线&lt;/text&gt;&lt;text x='1080' y='243.4' fontSize='13' fill='#5A6B7A' textAnchor='end' fontFamily='Microsoft YaHei'&gt;W25&lt;/text&gt;&lt;rect x='0' y='293.6' width='1152' height='48.0' rx='7' fill='#F2F7FD' /&gt;&lt;text x='16' y='322.6' fontSize='15' fontWeight='bold' fill='#1F5FA8' fontFamily='Microsoft YaHei'&gt;第 101 节&lt;/text&gt;&lt;text x='96' y='322.6' fontSize='15' fill='#16232E' fontFamily='Microsoft YaHei'&gt;edit_entry 的双重保护&lt;/text&gt;&lt;text x='1080' y='322.6' fontSize='13' fill='#5A6B7A' textAnchor='end' fontFamily='Microsoft YaHei'&gt;W25&lt;/text&gt;&lt;rect x='0' y='372.8' width='1152' height='48.0' rx='7' fill='#FFFFFF' /&gt;&lt;text x='16' y='401.8' fontSize='15' fontWeight='bold' fill='#1F5FA8' fontFamily='Microsoft YaHei'&gt;第 102 节&lt;/text&gt;&lt;text x='96' y='401.8' fontSize='15' fill='#16232E' fontFamily='Microsoft YaHei'&gt;动手实战、答案与验收复盘&lt;/text&gt;&lt;text x='1080' y='401.8' fontSize='13' fill='#5A6B7A' textAnchor='end' fontFamily='Microsoft YaHei'&gt;W25&lt;/text&gt;&#13;&#10;        &lt;/svg&gt;&#13;&#10;    &lt;/Box&gt;&#13;&#10;    &lt;Box style={{ position: 'absolute', left: 64, bottom: 22, width: '1152px', flexDirection: 'row', justifyContent: 'space-between' }}&gt;&#13;&#10;        &lt;Text style={{ fontSize: 13, color: '#8A9AAA' }}&gt;Python 讲授课件 · 逐节版&lt;/Text&gt;&#13;&#10;        &lt;Text style={{ fontSize: 13, color: '#8A9AAA' }}&gt;单元 19 · 封面&lt;/Text&gt;&#13;&#10;    &lt;/Box&gt;&#13;&#10;&lt;/Slide&gt;&#13;&#10;"/>
         <p:cNvGrpSpPr/>
         <p:nvPr/>
       </p:nvGrpSpPr>
@@ -3277,7 +1069,7 @@
   <p:cSld>
     <p:spTree>
       <p:nvGrpSpPr>
-        <p:cNvPr id="15" name="" descr="&lt;Slide style={{ width: '1280px', height: '720px', backgroundColor: '#FAFCFE', padding: 0, position: 'relative', overflow: 'hidden' }}&gt;&#13;&#10;    &lt;Box style={{ position: 'absolute', left: 64, top: 36, width: '1152px', flexDirection: 'row', alignItems: 'center', gap: 12 }}&gt;&#13;&#10;        &lt;Box style={{ background: '#0E9B78', borderRadius: 5, padding: '3px 11px' }}&gt;&#13;&#10;            &lt;Text style={{ fontSize: 14, fontWeight: 'bold', color: '#FFFFFF' }}&gt;第 102 节&lt;/Text&gt;&#13;&#10;        &lt;/Box&gt;&#13;&#10;        &lt;Text style={{ fontSize: 30, fontWeight: 'bold', color: '#16232E' }}&gt;核心知识点&lt;/Text&gt;&#13;&#10;        &lt;Text style={{ fontSize: 15, color: '#5A6B7A', marginTop: 10 }}&gt;· 动手实战、答案与验收复盘&lt;/Text&gt;&#13;&#10;    &lt;/Box&gt;&#13;&#10;    &lt;Box style={{ position: 'absolute', left: 0, top: 0, width: '1280px', height: '720px' }}&gt;&#13;&#10;        &lt;svg width='1280' height='720' viewBox='0 0 1280 720'&gt;&#13;&#10;            &lt;rect x='64' y='96' width='368' height='330' rx='12' fill='#FFFFFF' stroke='#D8E3EE' /&gt;&lt;rect x='64' y='96' width='368' height='4' rx='2' fill='#1F5FA8' /&gt;&lt;text x='82' y='130' fontSize='15.5' fontWeight='bold' fill='#1F5FA8' textAnchor='start' fontFamily='Microsoft YaHei'&gt;基础档&lt;/text&gt;&lt;text x='82' y='169.0' fontSize='13' fill='#3A4A58' textAnchor='start' fontFamily='Microsoft YaHei'&gt;· 练习 19-1【登录页与注销】&lt;/text&gt;&lt;text x='82' y='197.5' fontSize='13' fill='#3A4A58' textAnchor='start' fontFamily='Microsoft YaHei'&gt;· 练习 19-2【注册页面】&lt;/text&gt;&lt;text x='82' y='226.0' fontSize='13' fill='#3A4A58' textAnchor='start' fontFamily='Microsoft YaHei'&gt;· 练习 19-3【让每个用户只有自己的主题】&lt;/text&gt;&lt;rect x='468' y='96' width='368' height='330' rx='12' fill='#FFFFFF' stroke='#D8E3EE' /&gt;&lt;rect x='468' y='96' width='368' height='4' rx='2' fill='#1F5FA8' /&gt;&lt;text x='486' y='130' fontSize='15.5' fontWeight='bold' fill='#1F5FA8' textAnchor='start' fontFamily='Microsoft YaHei'&gt;进阶档&lt;/text&gt;&lt;text x='486' y='169.0' fontSize='13' fill='#3A4A58' textAnchor='start' fontFamily='Microsoft YaHei'&gt;· 练习 19-4【教材练习 19.3：重构 check_topic_owne&lt;/text&gt;&lt;text x='486' y='188.5' fontSize='13' fill='#3A4A58' textAnchor='start' fontFamily='Microsoft YaHei'&gt;r()】&lt;/text&gt;&lt;text x='486' y='217.0' fontSize='13' fill='#3A4A58' textAnchor='start' fontFamily='Microsoft YaHei'&gt;· 练习 19-5【教材练习 19.4：保护 new_entry】&lt;/text&gt;&lt;text x='486' y='245.5' fontSize='13' fill='#3A4A58' textAnchor='start' fontFamily='Microsoft YaHei'&gt;· 练习 19-6【纯 Python：带用户隔离的笔记本】&lt;/text&gt;&lt;rect x='872' y='96' width='368' height='330' rx='12' fill='#FFFFFF' stroke='#D8E3EE' /&gt;&lt;rect x='872' y='96' width='368' height='4' rx='2' fill='#1F5FA8' /&gt;&lt;text x='890' y='130' fontSize='15.5' fontWeight='bold' fill='#1F5FA8' textAnchor='start' fontFamily='Microsoft YaHei'&gt;参考答案 19-1&lt;/text&gt;&lt;text x='890' y='169.0' fontSize='13' fill='#3A4A58' textAnchor='start' fontFamily='Microsoft YaHei'&gt;· &quot;&quot;&quot;为应用程序 accounts 定义 URL 模式&quot;&quot;&quot;&lt;/text&gt;&lt;rect x='64' y='574' width='1152' height='66' rx='12' fill='#EEF5FB' /&gt;&lt;text x='84' y='616' fontSize='14' fill='#243444' textAnchor='start' fontFamily='Microsoft YaHei'&gt;看不懂的地方先回讲义对应小节读一遍，再回来对着这页复述一次——能讲出来才算真懂。&lt;/text&gt;&#13;&#10;            &lt;text x='64' y='684' fontSize='13' fill='#8A9AAA' fontFamily='Microsoft YaHei'&gt;Python 讲授课件 · 逐节版&lt;/text&gt;&#13;&#10;            &lt;text x='1216' y='684' fontSize='13' fill='#8A9AAA' textAnchor='end' fontFamily='Microsoft YaHei'&gt;单元 19 · 第 102 节&lt;/text&gt;&#13;&#10;        &lt;/svg&gt;&#13;&#10;    &lt;/Box&gt;&#13;&#10;&lt;/Slide&gt;&#13;&#10;"/>
+        <p:cNvPr id="15" name="" descr="&lt;Slide style={{ width: '1280px', height: '720px', backgroundColor: '#FAFCFE', padding: 0, position: 'relative', overflow: 'hidden' }}&gt;&#13;&#10;    &lt;Box style={{ position: 'absolute', left: 64, top: 36, width: '1152px', flexDirection: 'row', alignItems: 'center', gap: 12 }}&gt;&#13;&#10;        &lt;Box style={{ background: '#0E9B78', borderRadius: 5, padding: '3px 11px' }}&gt;&#13;&#10;            &lt;Text style={{ fontSize: 14, fontWeight: 'bold', color: '#FFFFFF' }}&gt;第 102 节&lt;/Text&gt;&#13;&#10;        &lt;/Box&gt;&#13;&#10;        &lt;Text style={{ fontSize: 30, fontWeight: 'bold', color: '#16232E' }}&gt;核心知识点&lt;/Text&gt;&#13;&#10;        &lt;Text style={{ fontSize: 15, color: '#5A6B7A', marginTop: 10 }}&gt;· 动手实战、答案与验收复盘&lt;/Text&gt;&#13;&#10;    &lt;/Box&gt;&#13;&#10;    &lt;Box style={{ position: 'absolute', left: 0, top: 0, width: '1280px', height: '720px' }}&gt;&#13;&#10;        &lt;svg width='1280' height='720' viewBox='0 0 1280 720'&gt;&#13;&#10;            &lt;rect x='64' y='96' width='368' height='330' rx='12' fill='#FFFFFF' stroke='#D8E3EE' /&gt;&lt;rect x='64' y='96' width='368' height='4' rx='2' fill='#1F5FA8' /&gt;&lt;text x='82' y='130' fontSize='15.5' fontWeight='bold' fill='#1F5FA8' textAnchor='start' fontFamily='Microsoft YaHei'&gt;基础档&lt;/text&gt;&lt;text x='82' y='169.0' fontSize='13' fill='#3A4A58' textAnchor='start' fontFamily='Microsoft YaHei'&gt;· 练习 19-1【登录页与注销】&lt;/text&gt;&lt;text x='82' y='197.5' fontSize='13' fill='#3A4A58' textAnchor='start' fontFamily='Microsoft YaHei'&gt;· 练习 19-2【注册页面】&lt;/text&gt;&lt;text x='82' y='226.0' fontSize='13' fill='#3A4A58' textAnchor='start' fontFamily='Microsoft YaHei'&gt;· 练习 19-3【让每个用户只有自己的主题】&lt;/text&gt;&lt;rect x='468' y='96' width='368' height='330' rx='12' fill='#FFFFFF' stroke='#D8E3EE' /&gt;&lt;rect x='468' y='96' width='368' height='4' rx='2' fill='#1F5FA8' /&gt;&lt;text x='486' y='130' fontSize='15.5' fontWeight='bold' fill='#1F5FA8' textAnchor='start' fontFamily='Microsoft YaHei'&gt;进阶档&lt;/text&gt;&lt;text x='486' y='169.0' fontSize='13' fill='#3A4A58' textAnchor='start' fontFamily='Microsoft YaHei'&gt;· 练习 19-4【教材练习 19.3：重构&lt;/text&gt;&lt;text x='486' y='188.5' fontSize='13' fill='#3A4A58' textAnchor='start' fontFamily='Microsoft YaHei'&gt;check_topic_owner()】&lt;/text&gt;&lt;text x='486' y='217.0' fontSize='13' fill='#3A4A58' textAnchor='start' fontFamily='Microsoft YaHei'&gt;· 练习 19-5【教材练习 19.4：保护 new_entry】&lt;/text&gt;&lt;text x='486' y='245.5' fontSize='13' fill='#3A4A58' textAnchor='start' fontFamily='Microsoft YaHei'&gt;· 练习 19-6【纯 Python：带用户隔离的笔记本】&lt;/text&gt;&lt;rect x='872' y='96' width='368' height='330' rx='12' fill='#FFFFFF' stroke='#D8E3EE' /&gt;&lt;rect x='872' y='96' width='368' height='4' rx='2' fill='#1F5FA8' /&gt;&lt;text x='890' y='130' fontSize='15.5' fontWeight='bold' fill='#1F5FA8' textAnchor='start' fontFamily='Microsoft YaHei'&gt;参考答案 19-1&lt;/text&gt;&lt;text x='890' y='169.0' fontSize='13' fill='#3A4A58' textAnchor='start' fontFamily='Microsoft YaHei'&gt;· base.html 的改法见示例 8 的完整版（问候语 +&lt;/text&gt;&lt;text x='890' y='188.5' fontSize='13' fill='#3A4A58' textAnchor='start' fontFamily='Microsoft YaHei'&gt;注销表单）…&lt;/text&gt;&lt;text x='890' y='217.0' fontSize='13' fill='#3A4A58' textAnchor='start' fontFamily='Microsoft YaHei'&gt;· 别忘了 INSTALLED_APPS 里加 &quot;accounts&quot;。&lt;/text&gt;&lt;rect x='64' y='574' width='1152' height='66' rx='12' fill='#EEF5FB' /&gt;&lt;text x='84' y='616' fontSize='14' fill='#243444' textAnchor='start' fontFamily='Microsoft YaHei'&gt;看不懂的地方先回讲义对应小节读一遍，再回来对着这页复述一次——能讲出来才算真懂。&lt;/text&gt;&#13;&#10;            &lt;text x='64' y='684' fontSize='13' fill='#8A9AAA' fontFamily='Microsoft YaHei'&gt;Python 讲授课件 · 逐节版&lt;/text&gt;&#13;&#10;            &lt;text x='1216' y='684' fontSize='13' fill='#8A9AAA' textAnchor='end' fontFamily='Microsoft YaHei'&gt;单元 19 · 第 102 节&lt;/text&gt;&#13;&#10;        &lt;/svg&gt;&#13;&#10;    &lt;/Box&gt;&#13;&#10;&lt;/Slide&gt;&#13;&#10;"/>
         <p:cNvGrpSpPr/>
         <p:nvPr/>
       </p:nvGrpSpPr>
@@ -4298,7 +2090,7 @@
   <p:cSld>
     <p:spTree>
       <p:nvGrpSpPr>
-        <p:cNvPr id="42" name="" descr="&lt;Slide style={{ width: '1280px', height: '720px', backgroundColor: '#FAFCFE', padding: 0, position: 'relative', overflow: 'hidden' }}&gt;&#13;&#10;    &lt;Box style={{ position: 'absolute', left: 64, top: 36, width: '1152px', flexDirection: 'row', alignItems: 'center', gap: 12 }}&gt;&#13;&#10;        &lt;Box style={{ background: '#0E9B78', borderRadius: 5, padding: '3px 11px' }}&gt;&#13;&#10;            &lt;Text style={{ fontSize: 14, fontWeight: 'bold', color: '#FFFFFF' }}&gt;第 98 节&lt;/Text&gt;&#13;&#10;        &lt;/Box&gt;&#13;&#10;        &lt;Text style={{ fontSize: 30, fontWeight: 'bold', color: '#16232E' }}&gt;核心知识点&lt;/Text&gt;&#13;&#10;        &lt;Text style={{ fontSize: 15, color: '#5A6B7A', marginTop: 10 }}&gt;· 表单与数据归属三段式&lt;/Text&gt;&#13;&#10;    &lt;/Box&gt;&#13;&#10;    &lt;Box style={{ position: 'absolute', left: 0, top: 0, width: '1280px', height: '720px' }}&gt;&#13;&#10;        &lt;svg width='1280' height='720' viewBox='0 0 1280 720'&gt;&#13;&#10;            &lt;rect x='64' y='96' width='548' height='330' rx='12' fill='#FFFFFF' stroke='#D8E3EE' /&gt;&lt;rect x='64' y='96' width='548' height='4' rx='2' fill='#1F5FA8' /&gt;&lt;text x='82' y='130' fontSize='15.5' fontWeight='bold' fill='#1F5FA8' textAnchor='start' fontFamily='Microsoft YaHei'&gt;2.1 表单与 ModelForm：把模型变成表单的捷径&lt;/text&gt;&lt;text x='82' y='169.0' fontSize='13' fill='#3A4A58' textAnchor='start' fontFamily='Microsoft YaHei'&gt;· fields 白名单是安全措施，不是省事措施。 它精确规定「用户能碰哪些列」。假如把 &lt;/text&gt;&lt;text x='82' y='188.5' fontSize='13' fill='#3A4A58' textAnchor='start' fontFamily='Microsoft YaHei'&gt;owner（数据…&lt;/text&gt;&lt;rect x='668' y='96' width='548' height='330' rx='12' fill='#FFFFFF' stroke='#D8E3EE' /&gt;&lt;rect x='668' y='96' width='548' height='4' rx='2' fill='#1F5FA8' /&gt;&lt;text x='686' y='130' fontSize='15.5' fontWeight='bold' fill='#1F5FA8' textAnchor='start' fontFamily='Microsoft YaHei'&gt;2.2 三段式与数据归属：commit=False 的经典…&lt;/text&gt;&lt;text x='686' y='169.0' fontSize='13' fill='#3A4A58' textAnchor='start' fontFamily='Microsoft YaHei'&gt;· 为什么需要 commit=False？ 用户填的表单里没有「这条主题归谁」——那是系统根据&lt;/text&gt;&lt;text x='686' y='188.5' fontSize='13' fill='#3A4A58' textAnchor='start' fontFamily='Microsoft YaHei'&gt;当前登录用户…&lt;/text&gt;&lt;rect x='64' y='574' width='1152' height='66' rx='12' fill='#EEF5FB' /&gt;&lt;text x='84' y='616' fontSize='14' fill='#243444' textAnchor='start' fontFamily='Microsoft YaHei'&gt;看不懂的地方先回讲义对应小节读一遍，再回来对着这页复述一次——能讲出来才算真懂。&lt;/text&gt;&#13;&#10;            &lt;text x='64' y='684' fontSize='13' fill='#8A9AAA' fontFamily='Microsoft YaHei'&gt;Python 讲授课件 · 逐节版&lt;/text&gt;&#13;&#10;            &lt;text x='1216' y='684' fontSize='13' fill='#8A9AAA' textAnchor='end' fontFamily='Microsoft YaHei'&gt;单元 19 · 第 98 节&lt;/text&gt;&#13;&#10;        &lt;/svg&gt;&#13;&#10;    &lt;/Box&gt;&#13;&#10;&lt;/Slide&gt;&#13;&#10;"/>
+        <p:cNvPr id="42" name="" descr="&lt;Slide style={{ width: '1280px', height: '720px', backgroundColor: '#FAFCFE', padding: 0, position: 'relative', overflow: 'hidden' }}&gt;&#13;&#10;    &lt;Box style={{ position: 'absolute', left: 64, top: 36, width: '1152px', flexDirection: 'row', alignItems: 'center', gap: 12 }}&gt;&#13;&#10;        &lt;Box style={{ background: '#0E9B78', borderRadius: 5, padding: '3px 11px' }}&gt;&#13;&#10;            &lt;Text style={{ fontSize: 14, fontWeight: 'bold', color: '#FFFFFF' }}&gt;第 98 节&lt;/Text&gt;&#13;&#10;        &lt;/Box&gt;&#13;&#10;        &lt;Text style={{ fontSize: 30, fontWeight: 'bold', color: '#16232E' }}&gt;核心知识点&lt;/Text&gt;&#13;&#10;        &lt;Text style={{ fontSize: 15, color: '#5A6B7A', marginTop: 10 }}&gt;· 表单与数据归属三段式&lt;/Text&gt;&#13;&#10;    &lt;/Box&gt;&#13;&#10;    &lt;Box style={{ position: 'absolute', left: 0, top: 0, width: '1280px', height: '720px' }}&gt;&#13;&#10;        &lt;svg width='1280' height='720' viewBox='0 0 1280 720'&gt;&#13;&#10;            &lt;rect x='64' y='96' width='548' height='330' rx='12' fill='#FFFFFF' stroke='#D8E3EE' /&gt;&lt;rect x='64' y='96' width='548' height='4' rx='2' fill='#1F5FA8' /&gt;&lt;text x='82' y='130' fontSize='15.5' fontWeight='bold' fill='#1F5FA8' textAnchor='start' fontFamily='Microsoft YaHei'&gt;2.1 表单与 ModelForm：把模型变成表单的捷径&lt;/text&gt;&lt;text x='82' y='169.0' fontSize='13' fill='#3A4A58' textAnchor='start' fontFamily='Microsoft YaHei'&gt;· fields 白名单是安全措施，不是省事措施。&lt;/text&gt;&lt;rect x='668' y='96' width='548' height='330' rx='12' fill='#FFFFFF' stroke='#D8E3EE' /&gt;&lt;rect x='668' y='96' width='548' height='4' rx='2' fill='#1F5FA8' /&gt;&lt;text x='686' y='130' fontSize='15.5' fontWeight='bold' fill='#1F5FA8' textAnchor='start' fontFamily='Microsoft YaHei'&gt;2.2 三段式与数据归属：commit=False 的经典…&lt;/text&gt;&lt;text x='686' y='169.0' fontSize='13' fill='#3A4A58' textAnchor='start' fontFamily='Microsoft YaHei'&gt;· 为什么需要 commit=False？&lt;/text&gt;&lt;rect x='64' y='574' width='1152' height='66' rx='12' fill='#EEF5FB' /&gt;&lt;text x='84' y='616' fontSize='14' fill='#243444' textAnchor='start' fontFamily='Microsoft YaHei'&gt;看不懂的地方先回讲义对应小节读一遍，再回来对着这页复述一次——能讲出来才算真懂。&lt;/text&gt;&#13;&#10;            &lt;text x='64' y='684' fontSize='13' fill='#8A9AAA' fontFamily='Microsoft YaHei'&gt;Python 讲授课件 · 逐节版&lt;/text&gt;&#13;&#10;            &lt;text x='1216' y='684' fontSize='13' fill='#8A9AAA' textAnchor='end' fontFamily='Microsoft YaHei'&gt;单元 19 · 第 98 节&lt;/text&gt;&#13;&#10;        &lt;/svg&gt;&#13;&#10;    &lt;/Box&gt;&#13;&#10;&lt;/Slide&gt;&#13;&#10;"/>
         <p:cNvGrpSpPr/>
         <p:nvPr/>
       </p:nvGrpSpPr>
@@ -4729,7 +2521,7 @@
   <p:cSld>
     <p:spTree>
       <p:nvGrpSpPr>
-        <p:cNvPr id="55" name="" descr="&lt;Slide style={{ width: '1280px', height: '720px', backgroundColor: '#FAFCFE', padding: 0, position: 'relative', overflow: 'hidden' }}&gt;&#13;&#10;    &lt;Box style={{ position: 'absolute', left: 64, top: 36, width: '1152px', flexDirection: 'row', alignItems: 'center', gap: 12 }}&gt;&#13;&#10;        &lt;Box style={{ background: '#0E9B78', borderRadius: 5, padding: '3px 11px' }}&gt;&#13;&#10;            &lt;Text style={{ fontSize: 14, fontWeight: 'bold', color: '#FFFFFF' }}&gt;第 99 节&lt;/Text&gt;&#13;&#10;        &lt;/Box&gt;&#13;&#10;        &lt;Text style={{ fontSize: 30, fontWeight: 'bold', color: '#16232E' }}&gt;核心知识点&lt;/Text&gt;&#13;&#10;        &lt;Text style={{ fontSize: 15, color: '#5A6B7A', marginTop: 10 }}&gt;· 登录、注销与注册三件套&lt;/Text&gt;&#13;&#10;    &lt;/Box&gt;&#13;&#10;    &lt;Box style={{ position: 'absolute', left: 0, top: 0, width: '1280px', height: '720px' }}&gt;&#13;&#10;        &lt;svg width='1280' height='720' viewBox='0 0 1280 720'&gt;&#13;&#10;            &lt;rect x='64' y='96' width='548' height='330' rx='12' fill='#FFFFFF' stroke='#D8E3EE' /&gt;&lt;rect x='64' y='96' width='548' height='4' rx='2' fill='#1F5FA8' /&gt;&lt;text x='82' y='130' fontSize='15.5' fontWeight='bold' fill='#1F5FA8' textAnchor='start' fontFamily='Microsoft YaHei'&gt;2.3 request.user：每个请求自带的「当前用户」&lt;/text&gt;&lt;text x='82' y='169.0' fontSize='13' fill='#3A4A58' textAnchor='start' fontFamily='Microsoft YaHei'&gt;· Django 给每一个请求都挂上一个 user 对象，视图里直接用 request.user：已登录&lt;/text&gt;&lt;text x='82' y='188.5' fontSize='13' fill='#3A4A58' textAnchor='start' fontFamily='Microsoft YaHei'&gt;时…&lt;/text&gt;&lt;rect x='668' y='96' width='548' height='330' rx='12' fill='#FFFFFF' stroke='#D8E3EE' /&gt;&lt;rect x='668' y='96' width='548' height='4' rx='2' fill='#1F5FA8' /&gt;&lt;text x='686' y='130' fontSize='15.5' fontWeight='bold' fill='#1F5FA8' textAnchor='start' fontFamily='Microsoft YaHei'&gt;2.4 登录、注销、注册三件套&lt;/text&gt;&lt;text x='686' y='169.0' fontSize='13' fill='#3A4A58' textAnchor='start' fontFamily='Microsoft YaHei'&gt;· 登录和注销不用自己写视图——Django 自带的用户身份验证系统（django.contrib.a&lt;/text&gt;&lt;text x='686' y='188.5' fontSize='13' fill='#3A4A58' textAnchor='start' fontFamily='Microsoft YaHei'&gt;ut…&lt;/text&gt;&lt;text x='686' y='217.0' fontSize='13' fill='#3A4A58' textAnchor='start' fontFamily='Microsoft YaHei'&gt;· 注册页面 Django 不提供，得自己写——但表单可以用现成的 UserCreationForm，它&lt;/text&gt;&lt;text x='686' y='236.5' fontSize='13' fill='#3A4A58' textAnchor='start' fontFamily='Microsoft YaHei'&gt;自…&lt;/text&gt;&lt;rect x='64' y='574' width='1152' height='66' rx='12' fill='#EEF5FB' /&gt;&lt;text x='84' y='616' fontSize='14' fill='#243444' textAnchor='start' fontFamily='Microsoft YaHei'&gt;看不懂的地方先回讲义对应小节读一遍，再回来对着这页复述一次——能讲出来才算真懂。&lt;/text&gt;&#13;&#10;            &lt;text x='64' y='684' fontSize='13' fill='#8A9AAA' fontFamily='Microsoft YaHei'&gt;Python 讲授课件 · 逐节版&lt;/text&gt;&#13;&#10;            &lt;text x='1216' y='684' fontSize='13' fill='#8A9AAA' textAnchor='end' fontFamily='Microsoft YaHei'&gt;单元 19 · 第 99 节&lt;/text&gt;&#13;&#10;        &lt;/svg&gt;&#13;&#10;    &lt;/Box&gt;&#13;&#10;&lt;/Slide&gt;&#13;&#10;"/>
+        <p:cNvPr id="55" name="" descr="&lt;Slide style={{ width: '1280px', height: '720px', backgroundColor: '#FAFCFE', padding: 0, position: 'relative', overflow: 'hidden' }}&gt;&#13;&#10;    &lt;Box style={{ position: 'absolute', left: 64, top: 36, width: '1152px', flexDirection: 'row', alignItems: 'center', gap: 12 }}&gt;&#13;&#10;        &lt;Box style={{ background: '#0E9B78', borderRadius: 5, padding: '3px 11px' }}&gt;&#13;&#10;            &lt;Text style={{ fontSize: 14, fontWeight: 'bold', color: '#FFFFFF' }}&gt;第 99 节&lt;/Text&gt;&#13;&#10;        &lt;/Box&gt;&#13;&#10;        &lt;Text style={{ fontSize: 30, fontWeight: 'bold', color: '#16232E' }}&gt;核心知识点&lt;/Text&gt;&#13;&#10;        &lt;Text style={{ fontSize: 15, color: '#5A6B7A', marginTop: 10 }}&gt;· 登录、注销与注册三件套&lt;/Text&gt;&#13;&#10;    &lt;/Box&gt;&#13;&#10;    &lt;Box style={{ position: 'absolute', left: 0, top: 0, width: '1280px', height: '720px' }}&gt;&#13;&#10;        &lt;svg width='1280' height='720' viewBox='0 0 1280 720'&gt;&#13;&#10;            &lt;rect x='64' y='96' width='548' height='330' rx='12' fill='#FFFFFF' stroke='#D8E3EE' /&gt;&lt;rect x='64' y='96' width='548' height='4' rx='2' fill='#1F5FA8' /&gt;&lt;text x='82' y='130' fontSize='15.5' fontWeight='bold' fill='#1F5FA8' textAnchor='start' fontFamily='Microsoft YaHei'&gt;2.3 request.user：每个请求自带的「当前用户」&lt;/text&gt;&lt;text x='82' y='169.0' fontSize='13' fill='#3A4A58' textAnchor='start' fontFamily='Microsoft YaHei'&gt;· Django 给每一个请求都挂上一个 user 对象，视图里直接用 request.user…&lt;/text&gt;&lt;text x='82' y='197.5' fontSize='13' fill='#3A4A58' textAnchor='start' fontFamily='Microsoft YaHei'&gt;· 这就是导航栏「已登录显示问候语、未登录显示登录链接」的实现——同一个变量，&lt;/text&gt;&lt;text x='82' y='217.0' fontSize='13' fill='#3A4A58' textAnchor='start' fontFamily='Microsoft YaHei'&gt;两种身份，模板自己判断。&lt;/text&gt;&lt;text x='82' y='245.5' fontSize='13' fill='#3A4A58' textAnchor='start' fontFamily='Microsoft YaHei'&gt;· 实跑输出里 alice 那行是 is_authenticated=True pk=1…&lt;/text&gt;&lt;rect x='668' y='96' width='548' height='330' rx='12' fill='#FFFFFF' stroke='#D8E3EE' /&gt;&lt;rect x='668' y='96' width='548' height='4' rx='2' fill='#1F5FA8' /&gt;&lt;text x='686' y='130' fontSize='15.5' fontWeight='bold' fill='#1F5FA8' textAnchor='start' fontFamily='Microsoft YaHei'&gt;2.4 登录、注销、注册三件套&lt;/text&gt;&lt;text x='686' y='169.0' fontSize='13' fill='#3A4A58' textAnchor='start' fontFamily='Microsoft YaHei'&gt;· 登录和注销不用自己写视图&lt;/text&gt;&lt;text x='686' y='197.5' fontSize='13' fill='#3A4A58' textAnchor='start' fontFamily='Microsoft YaHei'&gt;· 注册页面 Django 不提供，得自己写&lt;/text&gt;&lt;rect x='64' y='574' width='1152' height='66' rx='12' fill='#EEF5FB' /&gt;&lt;text x='84' y='616' fontSize='14' fill='#243444' textAnchor='start' fontFamily='Microsoft YaHei'&gt;看不懂的地方先回讲义对应小节读一遍，再回来对着这页复述一次——能讲出来才算真懂。&lt;/text&gt;&#13;&#10;            &lt;text x='64' y='684' fontSize='13' fill='#8A9AAA' fontFamily='Microsoft YaHei'&gt;Python 讲授课件 · 逐节版&lt;/text&gt;&#13;&#10;            &lt;text x='1216' y='684' fontSize='13' fill='#8A9AAA' textAnchor='end' fontFamily='Microsoft YaHei'&gt;单元 19 · 第 99 节&lt;/text&gt;&#13;&#10;        &lt;/svg&gt;&#13;&#10;    &lt;/Box&gt;&#13;&#10;&lt;/Slide&gt;&#13;&#10;"/>
         <p:cNvGrpSpPr/>
         <p:nvPr/>
       </p:nvGrpSpPr>
@@ -5170,7 +2962,7 @@
   <p:cSld>
     <p:spTree>
       <p:nvGrpSpPr>
-        <p:cNvPr id="68" name="" descr="&lt;Slide style={{ width: '1280px', height: '720px', backgroundColor: '#FAFCFE', padding: 0, position: 'relative', overflow: 'hidden' }}&gt;&#13;&#10;    &lt;Box style={{ position: 'absolute', left: 64, top: 36, width: '1152px', flexDirection: 'row', alignItems: 'center', gap: 12 }}&gt;&#13;&#10;        &lt;Box style={{ background: '#0E9B78', borderRadius: 5, padding: '3px 11px' }}&gt;&#13;&#10;            &lt;Text style={{ fontSize: 14, fontWeight: 'bold', color: '#FFFFFF' }}&gt;第 100 节&lt;/Text&gt;&#13;&#10;        &lt;/Box&gt;&#13;&#10;        &lt;Text style={{ fontSize: 30, fontWeight: 'bold', color: '#16232E' }}&gt;核心知识点&lt;/Text&gt;&#13;&#10;        &lt;Text style={{ fontSize: 15, color: '#5A6B7A', marginTop: 10 }}&gt;· ★ @login_required 与数据…&lt;/Text&gt;&#13;&#10;    &lt;/Box&gt;&#13;&#10;    &lt;Box style={{ position: 'absolute', left: 0, top: 0, width: '1280px', height: '720px' }}&gt;&#13;&#10;        &lt;svg width='1280' height='720' viewBox='0 0 1280 720'&gt;&#13;&#10;            &lt;rect x='64' y='96' width='548' height='330' rx='12' fill='#FFFFFF' stroke='#D8E3EE' /&gt;&lt;rect x='64' y='96' width='548' height='4' rx='2' fill='#1F5FA8' /&gt;&lt;text x='82' y='130' fontSize='15.5' fontWeight='bold' fill='#1F5FA8' textAnchor='start' fontFamily='Microsoft YaHei'&gt;2.5 @login_required：视图的门卫 ★&lt;/text&gt;&lt;text x='82' y='169.0' fontSize='13' fill='#3A4A58' textAnchor='start' fontFamily='Microsoft YaHei'&gt;· 装饰器是放在函数定义前面的「@ 指令」，在函数运行前先跑一遍自己的代码。@login_&lt;/text&gt;&lt;text x='82' y='188.5' fontSize='13' fill='#3A4A58' textAnchor='start' fontFamily='Microsoft YaHei'&gt;required…&lt;/text&gt;&lt;rect x='668' y='96' width='548' height='330' rx='12' fill='#FFFFFF' stroke='#D8E3EE' /&gt;&lt;rect x='668' y='96' width='548' height='4' rx='2' fill='#1F5FA8' /&gt;&lt;text x='686' y='130' fontSize='15.5' fontWeight='bold' fill='#1F5FA8' textAnchor='start' fontFamily='Microsoft YaHei'&gt;2.6 数据隔离的安全红线 ★★★&lt;/text&gt;&lt;text x='686' y='169.0' fontSize='13' fill='#3A4A58' textAnchor='start' fontFamily='Microsoft YaHei'&gt;· 本单元最重要的一句话：查询数据时，必须按当前用户过滤。写 Topic.objects.filte&lt;/text&gt;&lt;text x='686' y='188.5' fontSize='13' fill='#3A4A58' textAnchor='start' fontFamily='Microsoft YaHei'&gt;r(o…&lt;/text&gt;&lt;rect x='64' y='574' width='1152' height='66' rx='12' fill='#EEF5FB' /&gt;&lt;text x='84' y='616' fontSize='14' fill='#243444' textAnchor='start' fontFamily='Microsoft YaHei'&gt;看不懂的地方先回讲义对应小节读一遍，再回来对着这页复述一次——能讲出来才算真懂。&lt;/text&gt;&#13;&#10;            &lt;text x='64' y='684' fontSize='13' fill='#8A9AAA' fontFamily='Microsoft YaHei'&gt;Python 讲授课件 · 逐节版&lt;/text&gt;&#13;&#10;            &lt;text x='1216' y='684' fontSize='13' fill='#8A9AAA' textAnchor='end' fontFamily='Microsoft YaHei'&gt;单元 19 · 第 100 节&lt;/text&gt;&#13;&#10;        &lt;/svg&gt;&#13;&#10;    &lt;/Box&gt;&#13;&#10;&lt;/Slide&gt;&#13;&#10;"/>
+        <p:cNvPr id="68" name="" descr="&lt;Slide style={{ width: '1280px', height: '720px', backgroundColor: '#FAFCFE', padding: 0, position: 'relative', overflow: 'hidden' }}&gt;&#13;&#10;    &lt;Box style={{ position: 'absolute', left: 64, top: 36, width: '1152px', flexDirection: 'row', alignItems: 'center', gap: 12 }}&gt;&#13;&#10;        &lt;Box style={{ background: '#0E9B78', borderRadius: 5, padding: '3px 11px' }}&gt;&#13;&#10;            &lt;Text style={{ fontSize: 14, fontWeight: 'bold', color: '#FFFFFF' }}&gt;第 100 节&lt;/Text&gt;&#13;&#10;        &lt;/Box&gt;&#13;&#10;        &lt;Text style={{ fontSize: 30, fontWeight: 'bold', color: '#16232E' }}&gt;核心知识点&lt;/Text&gt;&#13;&#10;        &lt;Text style={{ fontSize: 15, color: '#5A6B7A', marginTop: 10 }}&gt;· ★ @login_required 与数据…&lt;/Text&gt;&#13;&#10;    &lt;/Box&gt;&#13;&#10;    &lt;Box style={{ position: 'absolute', left: 0, top: 0, width: '1280px', height: '720px' }}&gt;&#13;&#10;        &lt;svg width='1280' height='720' viewBox='0 0 1280 720'&gt;&#13;&#10;            &lt;rect x='64' y='96' width='548' height='330' rx='12' fill='#FFFFFF' stroke='#D8E3EE' /&gt;&lt;rect x='64' y='96' width='548' height='4' rx='2' fill='#1F5FA8' /&gt;&lt;text x='82' y='130' fontSize='15.5' fontWeight='bold' fill='#1F5FA8' textAnchor='start' fontFamily='Microsoft YaHei'&gt;2.5 @login_required：视图的门卫 ★&lt;/text&gt;&lt;text x='82' y='169.0' fontSize='13' fill='#3A4A58' textAnchor='start' fontFamily='Microsoft YaHei'&gt;· 装饰器是放在函数定义前面的「@ 指令」，在函数运行前先跑一遍自己的代码。&lt;/text&gt;&lt;text x='82' y='197.5' fontSize='13' fill='#3A4A58' textAnchor='start' fontFamily='Microsoft YaHei'&gt;· 保护策略（教材的建议，值得抄走）：先列出哪些页面不需要保护——主页（谁都能看）&lt;/text&gt;&lt;text x='82' y='217.0' fontSize='13' fill='#3A4A58' textAnchor='start' fontFamily='Microsoft YaHei'&gt;…&lt;/text&gt;&lt;rect x='668' y='96' width='548' height='330' rx='12' fill='#FFFFFF' stroke='#D8E3EE' /&gt;&lt;rect x='668' y='96' width='548' height='4' rx='2' fill='#1F5FA8' /&gt;&lt;text x='686' y='130' fontSize='15.5' fontWeight='bold' fill='#1F5FA8' textAnchor='start' fontFamily='Microsoft YaHei'&gt;2.6 数据隔离的安全红线 ★★★&lt;/text&gt;&lt;text x='686' y='169.0' fontSize='13' fill='#3A4A58' textAnchor='start' fontFamily='Microsoft YaHei'&gt;· 本单元最重要的一句话：查询数据时，必须按当前用户过滤。&lt;/text&gt;&lt;text x='686' y='197.5' fontSize='13' fill='#3A4A58' textAnchor='start' fontFamily='Microsoft YaHei'&gt;· .all() 的后果：用户 A 登录后，能看到用户 B 的所有主题和条目。&lt;/text&gt;&lt;text x='686' y='226.0' fontSize='13' fill='#3A4A58' textAnchor='start' fontFamily='Microsoft YaHei'&gt;· 为什么「查出来再在 Python 里筛」不行？&lt;/text&gt;&lt;rect x='64' y='574' width='1152' height='66' rx='12' fill='#EEF5FB' /&gt;&lt;text x='84' y='616' fontSize='14' fill='#243444' textAnchor='start' fontFamily='Microsoft YaHei'&gt;看不懂的地方先回讲义对应小节读一遍，再回来对着这页复述一次——能讲出来才算真懂。&lt;/text&gt;&#13;&#10;            &lt;text x='64' y='684' fontSize='13' fill='#8A9AAA' fontFamily='Microsoft YaHei'&gt;Python 讲授课件 · 逐节版&lt;/text&gt;&#13;&#10;            &lt;text x='1216' y='684' fontSize='13' fill='#8A9AAA' textAnchor='end' fontFamily='Microsoft YaHei'&gt;单元 19 · 第 100 节&lt;/text&gt;&#13;&#10;        &lt;/svg&gt;&#13;&#10;    &lt;/Box&gt;&#13;&#10;&lt;/Slide&gt;&#13;&#10;"/>
         <p:cNvGrpSpPr/>
         <p:nvPr/>
       </p:nvGrpSpPr>
@@ -5611,7 +3403,7 @@
   <p:cSld>
     <p:spTree>
       <p:nvGrpSpPr>
-        <p:cNvPr id="81" name="" descr="&lt;Slide style={{ width: '1280px', height: '720px', backgroundColor: '#FAFCFE', padding: 0, position: 'relative', overflow: 'hidden' }}&gt;&#13;&#10;    &lt;Box style={{ position: 'absolute', left: 64, top: 36, width: '1152px', flexDirection: 'row', alignItems: 'center', gap: 12 }}&gt;&#13;&#10;        &lt;Box style={{ background: '#0E9B78', borderRadius: 5, padding: '3px 11px' }}&gt;&#13;&#10;            &lt;Text style={{ fontSize: 14, fontWeight: 'bold', color: '#FFFFFF' }}&gt;第 101 节&lt;/Text&gt;&#13;&#10;        &lt;/Box&gt;&#13;&#10;        &lt;Text style={{ fontSize: 30, fontWeight: 'bold', color: '#16232E' }}&gt;核心知识点&lt;/Text&gt;&#13;&#10;        &lt;Text style={{ fontSize: 15, color: '#5A6B7A', marginTop: 10 }}&gt;· edit_entry 的双重保护&lt;/Text&gt;&#13;&#10;    &lt;/Box&gt;&#13;&#10;    &lt;Box style={{ position: 'absolute', left: 0, top: 0, width: '1280px', height: '720px' }}&gt;&#13;&#10;        &lt;svg width='1280' height='720' viewBox='0 0 1280 720'&gt;&#13;&#10;            &lt;rect x='64' y='96' width='1152' height='330' rx='12' fill='#FFFFFF' stroke='#D8E3EE' /&gt;&lt;rect x='64' y='96' width='1152' height='4' rx='2' fill='#1F5FA8' /&gt;&lt;text x='82' y='130' fontSize='15.5' fontWeight='bold' fill='#1F5FA8' textAnchor='start' fontFamily='Microsoft YaHei'&gt;2.7 edit_entry 的双重保护&lt;/text&gt;&lt;text x='82' y='169.0' fontSize='13' fill='#3A4A58' textAnchor='start' fontFamily='Microsoft YaHei'&gt;· Entry 自己没有 owner 字段——它的归属是从 topic 继承的（教材的设计：只需把最高层数…&lt;/text&gt;&lt;text x='64' y='470' fontSize='14.5' fontWeight='bold' fill='#0E9B78' textAnchor='start' fontFamily='Microsoft YaHei'&gt;本节的代码示例&lt;/text&gt;&lt;text x='64' y='500' fontSize='13' fill='#3A4A58' textAnchor='start' fontFamily='Microsoft YaHei'&gt;· 用纯 Python 看懂「字段白名单」&lt;/text&gt;&lt;text x='468' y='500' fontSize='13' fill='#3A4A58' textAnchor='start' fontFamily='Microsoft YaHei'&gt;· 用纯 Python 看懂 request.user&lt;/text&gt;&lt;text x='872' y='500' fontSize='13' fill='#3A4A58' textAnchor='start' fontFamily='Microsoft YaHei'&gt;· 用纯 Python 模拟 @login_required 门禁&lt;/text&gt;&lt;rect x='64' y='574' width='1152' height='66' rx='12' fill='#EEF5FB' /&gt;&lt;text x='84' y='616' fontSize='14' fill='#243444' textAnchor='start' fontFamily='Microsoft YaHei'&gt;看不懂的地方先回讲义对应小节读一遍，再回来对着这页复述一次——能讲出来才算真懂。&lt;/text&gt;&#13;&#10;            &lt;text x='64' y='684' fontSize='13' fill='#8A9AAA' fontFamily='Microsoft YaHei'&gt;Python 讲授课件 · 逐节版&lt;/text&gt;&#13;&#10;            &lt;text x='1216' y='684' fontSize='13' fill='#8A9AAA' textAnchor='end' fontFamily='Microsoft YaHei'&gt;单元 19 · 第 101 节&lt;/text&gt;&#13;&#10;        &lt;/svg&gt;&#13;&#10;    &lt;/Box&gt;&#13;&#10;&lt;/Slide&gt;&#13;&#10;"/>
+        <p:cNvPr id="81" name="" descr="&lt;Slide style={{ width: '1280px', height: '720px', backgroundColor: '#FAFCFE', padding: 0, position: 'relative', overflow: 'hidden' }}&gt;&#13;&#10;    &lt;Box style={{ position: 'absolute', left: 64, top: 36, width: '1152px', flexDirection: 'row', alignItems: 'center', gap: 12 }}&gt;&#13;&#10;        &lt;Box style={{ background: '#0E9B78', borderRadius: 5, padding: '3px 11px' }}&gt;&#13;&#10;            &lt;Text style={{ fontSize: 14, fontWeight: 'bold', color: '#FFFFFF' }}&gt;第 101 节&lt;/Text&gt;&#13;&#10;        &lt;/Box&gt;&#13;&#10;        &lt;Text style={{ fontSize: 30, fontWeight: 'bold', color: '#16232E' }}&gt;核心知识点&lt;/Text&gt;&#13;&#10;        &lt;Text style={{ fontSize: 15, color: '#5A6B7A', marginTop: 10 }}&gt;· edit_entry 的双重保护&lt;/Text&gt;&#13;&#10;    &lt;/Box&gt;&#13;&#10;    &lt;Box style={{ position: 'absolute', left: 0, top: 0, width: '1280px', height: '720px' }}&gt;&#13;&#10;        &lt;svg width='1280' height='720' viewBox='0 0 1280 720'&gt;&#13;&#10;            &lt;rect x='64' y='96' width='1152' height='330' rx='12' fill='#FFFFFF' stroke='#D8E3EE' /&gt;&lt;rect x='64' y='96' width='1152' height='4' rx='2' fill='#1F5FA8' /&gt;&lt;text x='82' y='130' fontSize='15.5' fontWeight='bold' fill='#1F5FA8' textAnchor='start' fontFamily='Microsoft YaHei'&gt;2.7 edit_entry 的双重保护&lt;/text&gt;&lt;text x='82' y='169.0' fontSize='13' fill='#3A4A58' textAnchor='start' fontFamily='Microsoft YaHei'&gt;· 进房间前要验两道——先查这个房间号（entry）在哪一层（topic）…&lt;/text&gt;&lt;text x='82' y='197.5' fontSize='13' fill='#3A4A58' textAnchor='start' fontFamily='Microsoft YaHei'&gt;· new_entry 同样要防（教材练习 19.4）：用户如果在 URL 里塞别人的 topic_id（…&lt;/text&gt;&lt;text x='64' y='470' fontSize='14.5' fontWeight='bold' fill='#0E9B78' textAnchor='start' fontFamily='Microsoft YaHei'&gt;本节的代码示例&lt;/text&gt;&lt;text x='64' y='500' fontSize='13' fill='#3A4A58' textAnchor='start' fontFamily='Microsoft YaHei'&gt;· 用纯 Python 看懂「字段白名单」&lt;/text&gt;&lt;text x='468' y='500' fontSize='13' fill='#3A4A58' textAnchor='start' fontFamily='Microsoft YaHei'&gt;· 用纯 Python 看懂 request.user&lt;/text&gt;&lt;text x='872' y='500' fontSize='13' fill='#3A4A58' textAnchor='start' fontFamily='Microsoft YaHei'&gt;· 用纯 Python 模拟 @login_required 门禁&lt;/text&gt;&lt;rect x='64' y='574' width='1152' height='66' rx='12' fill='#EEF5FB' /&gt;&lt;text x='84' y='616' fontSize='14' fill='#243444' textAnchor='start' fontFamily='Microsoft YaHei'&gt;看不懂的地方先回讲义对应小节读一遍，再回来对着这页复述一次——能讲出来才算真懂。&lt;/text&gt;&#13;&#10;            &lt;text x='64' y='684' fontSize='13' fill='#8A9AAA' fontFamily='Microsoft YaHei'&gt;Python 讲授课件 · 逐节版&lt;/text&gt;&#13;&#10;            &lt;text x='1216' y='684' fontSize='13' fill='#8A9AAA' textAnchor='end' fontFamily='Microsoft YaHei'&gt;单元 19 · 第 101 节&lt;/text&gt;&#13;&#10;        &lt;/svg&gt;&#13;&#10;    &lt;/Box&gt;&#13;&#10;&lt;/Slide&gt;&#13;&#10;"/>
         <p:cNvGrpSpPr/>
         <p:nvPr/>
       </p:nvGrpSpPr>

--- a/python-course-ppt/逐节课件/Python讲授课件-单元19.pptx
+++ b/python-course-ppt/逐节课件/Python讲授课件-单元19.pptx
@@ -236,6 +236,1260 @@
     </a:lvl9pPr>
   </p:notesStyle>
 </p:notesMaster>
+</file>
+
+<file path=ppt/notesSlides/notesSlide1.xml><?xml version="1.0" encoding="utf-8"?>
+<p:notes xmlns:a="http://schemas.openxmlformats.org/drawingml/2006/main" xmlns:p="http://schemas.openxmlformats.org/presentationml/2006/main" xmlns:r="http://schemas.openxmlformats.org/officeDocument/2006/relationships">
+  <p:cSld>
+    <p:spTree>
+      <p:nvGrpSpPr>
+        <p:cNvPr id="1" name=""/>
+        <p:cNvGrpSpPr/>
+        <p:nvPr/>
+      </p:nvGrpSpPr>
+      <p:grpSpPr>
+        <a:xfrm>
+          <a:off x="0" y="0"/>
+          <a:ext cx="0" cy="0"/>
+          <a:chOff x="0" y="0"/>
+          <a:chExt cx="0" cy="0"/>
+        </a:xfrm>
+      </p:grpSpPr>
+      <p:sp>
+        <p:nvSpPr>
+          <p:cNvPr id="2" name="讲课提示"/>
+          <p:cNvSpPr txBox="1"/>
+          <p:nvPr/>
+        </p:nvSpPr>
+        <p:spPr>
+          <a:xfrm>
+            <a:off x="457200" y="457200"/>
+            <a:ext cx="6858000" cy="4800600"/>
+          </a:xfrm>
+          <a:prstGeom prst="rect">
+            <a:avLst/>
+          </a:prstGeom>
+        </p:spPr>
+        <p:txBody>
+          <a:bodyPr wrap="square"/>
+          <a:lstStyle/>
+          <a:p>
+            <a:r>
+              <a:rPr lang="zh-CN" dirty="0"/>
+              <a:t>单元 19 · 单元 19 · 用户账户</a:t>
+            </a:r>
+          </a:p>
+          <a:p>
+            <a:r>
+              <a:rPr lang="zh-CN" dirty="0"/>
+              <a:t/>
+            </a:r>
+          </a:p>
+          <a:p>
+            <a:r>
+              <a:rPr lang="zh-CN" dirty="0"/>
+              <a:t>本单元包含以下课节：</a:t>
+            </a:r>
+          </a:p>
+          <a:p>
+            <a:r>
+              <a:rPr lang="zh-CN" dirty="0"/>
+              <a:t>· 第 98 节 表单与数据归属三段式</a:t>
+            </a:r>
+          </a:p>
+          <a:p>
+            <a:r>
+              <a:rPr lang="zh-CN" dirty="0"/>
+              <a:t>· 第 99 节 登录、注销与注册三件套</a:t>
+            </a:r>
+          </a:p>
+          <a:p>
+            <a:r>
+              <a:rPr lang="zh-CN" dirty="0"/>
+              <a:t>· 第 100 节 ★ @login_required 与数据隔离红线</a:t>
+            </a:r>
+          </a:p>
+          <a:p>
+            <a:r>
+              <a:rPr lang="zh-CN" dirty="0"/>
+              <a:t>· 第 101 节 edit_entry 的双重保护</a:t>
+            </a:r>
+          </a:p>
+          <a:p>
+            <a:r>
+              <a:rPr lang="zh-CN" dirty="0"/>
+              <a:t>· 第 102 节 动手实战、答案与验收复盘</a:t>
+            </a:r>
+          </a:p>
+          <a:p>
+            <a:r>
+              <a:rPr lang="zh-CN" dirty="0"/>
+              <a:t/>
+            </a:r>
+          </a:p>
+          <a:p>
+            <a:r>
+              <a:rPr lang="zh-CN" dirty="0"/>
+              <a:t>开场用 3 分钟讲清：这个单元学完能做出什么，最后会被关卡怎么验。</a:t>
+            </a:r>
+          </a:p>
+        </p:txBody>
+      </p:sp>
+    </p:spTree>
+  </p:cSld>
+  <p:clrMapOvr>
+    <a:masterClrMapping/>
+  </p:clrMapOvr>
+</p:notes>
+</file>
+
+<file path=ppt/notesSlides/notesSlide10.xml><?xml version="1.0" encoding="utf-8"?>
+<p:notes xmlns:a="http://schemas.openxmlformats.org/drawingml/2006/main" xmlns:p="http://schemas.openxmlformats.org/presentationml/2006/main" xmlns:r="http://schemas.openxmlformats.org/officeDocument/2006/relationships">
+  <p:cSld>
+    <p:spTree>
+      <p:nvGrpSpPr>
+        <p:cNvPr id="1" name=""/>
+        <p:cNvGrpSpPr/>
+        <p:nvPr/>
+      </p:nvGrpSpPr>
+      <p:grpSpPr>
+        <a:xfrm>
+          <a:off x="0" y="0"/>
+          <a:ext cx="0" cy="0"/>
+          <a:chOff x="0" y="0"/>
+          <a:chExt cx="0" cy="0"/>
+        </a:xfrm>
+      </p:grpSpPr>
+      <p:sp>
+        <p:nvSpPr>
+          <p:cNvPr id="2" name="讲课提示"/>
+          <p:cNvSpPr txBox="1"/>
+          <p:nvPr/>
+        </p:nvSpPr>
+        <p:spPr>
+          <a:xfrm>
+            <a:off x="457200" y="457200"/>
+            <a:ext cx="6858000" cy="4800600"/>
+          </a:xfrm>
+          <a:prstGeom prst="rect">
+            <a:avLst/>
+          </a:prstGeom>
+        </p:spPr>
+        <p:txBody>
+          <a:bodyPr wrap="square"/>
+          <a:lstStyle/>
+          <a:p>
+            <a:r>
+              <a:rPr lang="zh-CN" dirty="0"/>
+              <a:t>第 102 节 · 动手实战、答案与验收复盘</a:t>
+            </a:r>
+          </a:p>
+          <a:p>
+            <a:r>
+              <a:rPr lang="zh-CN" dirty="0"/>
+              <a:t>单元 19 · 用户账户 · W26</a:t>
+            </a:r>
+          </a:p>
+          <a:p>
+            <a:r>
+              <a:rPr lang="zh-CN" dirty="0"/>
+              <a:t/>
+            </a:r>
+          </a:p>
+          <a:p>
+            <a:r>
+              <a:rPr lang="zh-CN" dirty="0"/>
+              <a:t>学习目标：独立完成单元 19 练习，守住数据隔离红线</a:t>
+            </a:r>
+          </a:p>
+          <a:p>
+            <a:r>
+              <a:rPr lang="zh-CN" dirty="0"/>
+              <a:t/>
+            </a:r>
+          </a:p>
+          <a:p>
+            <a:r>
+              <a:rPr lang="zh-CN" dirty="0"/>
+              <a:t>课堂实操（40 分钟，不看答案）：</a:t>
+            </a:r>
+          </a:p>
+          <a:p>
+            <a:r>
+              <a:rPr lang="zh-CN" dirty="0"/>
+              <a:t>· 限时 40 分钟独立完成基础档</a:t>
+            </a:r>
+          </a:p>
+          <a:p>
+            <a:r>
+              <a:rPr lang="zh-CN" dirty="0"/>
+              <a:t>· 逐条演示六、里的每个错误</a:t>
+            </a:r>
+          </a:p>
+          <a:p>
+            <a:r>
+              <a:rPr lang="zh-CN" dirty="0"/>
+              <a:t/>
+            </a:r>
+          </a:p>
+          <a:p>
+            <a:r>
+              <a:rPr lang="zh-CN" dirty="0"/>
+              <a:t>课后作业：</a:t>
+            </a:r>
+          </a:p>
+          <a:p>
+            <a:r>
+              <a:rPr lang="zh-CN" dirty="0"/>
+              <a:t>· ★ 产出：带注册登录的完整学习笔记</a:t>
+            </a:r>
+          </a:p>
+          <a:p>
+            <a:r>
+              <a:rPr lang="zh-CN" dirty="0"/>
+              <a:t/>
+            </a:r>
+          </a:p>
+          <a:p>
+            <a:r>
+              <a:rPr lang="zh-CN" dirty="0"/>
+              <a:t>节奏：讲 20 分钟 → 学员自己敲 40 分钟（不看答案）→ 对讲评自查 20 分钟 → 写作业 10 分钟。</a:t>
+            </a:r>
+          </a:p>
+        </p:txBody>
+      </p:sp>
+    </p:spTree>
+  </p:cSld>
+  <p:clrMapOvr>
+    <a:masterClrMapping/>
+  </p:clrMapOvr>
+</p:notes>
+</file>
+
+<file path=ppt/notesSlides/notesSlide11.xml><?xml version="1.0" encoding="utf-8"?>
+<p:notes xmlns:a="http://schemas.openxmlformats.org/drawingml/2006/main" xmlns:p="http://schemas.openxmlformats.org/presentationml/2006/main" xmlns:r="http://schemas.openxmlformats.org/officeDocument/2006/relationships">
+  <p:cSld>
+    <p:spTree>
+      <p:nvGrpSpPr>
+        <p:cNvPr id="1" name=""/>
+        <p:cNvGrpSpPr/>
+        <p:nvPr/>
+      </p:nvGrpSpPr>
+      <p:grpSpPr>
+        <a:xfrm>
+          <a:off x="0" y="0"/>
+          <a:ext cx="0" cy="0"/>
+          <a:chOff x="0" y="0"/>
+          <a:chExt cx="0" cy="0"/>
+        </a:xfrm>
+      </p:grpSpPr>
+      <p:sp>
+        <p:nvSpPr>
+          <p:cNvPr id="2" name="讲课提示"/>
+          <p:cNvSpPr txBox="1"/>
+          <p:nvPr/>
+        </p:nvSpPr>
+        <p:spPr>
+          <a:xfrm>
+            <a:off x="457200" y="457200"/>
+            <a:ext cx="6858000" cy="4800600"/>
+          </a:xfrm>
+          <a:prstGeom prst="rect">
+            <a:avLst/>
+          </a:prstGeom>
+        </p:spPr>
+        <p:txBody>
+          <a:bodyPr wrap="square"/>
+          <a:lstStyle/>
+          <a:p>
+            <a:r>
+              <a:rPr lang="zh-CN" dirty="0"/>
+              <a:t>第 102 节 · 核心知识点：动手实战、答案与验收复盘</a:t>
+            </a:r>
+          </a:p>
+          <a:p>
+            <a:r>
+              <a:rPr lang="zh-CN" dirty="0"/>
+              <a:t/>
+            </a:r>
+          </a:p>
+          <a:p>
+            <a:r>
+              <a:rPr lang="zh-CN" dirty="0"/>
+              <a:t>讲这一页时：先让学生说出上节课的结论，再逐块讲要点。</a:t>
+            </a:r>
+          </a:p>
+          <a:p>
+            <a:r>
+              <a:rPr lang="zh-CN" dirty="0"/>
+              <a:t>每讲完一块，问一句「这一步如果写错了，报错会长什么样？」——把错误提前讲。</a:t>
+            </a:r>
+          </a:p>
+          <a:p>
+            <a:r>
+              <a:rPr lang="zh-CN" dirty="0"/>
+              <a:t/>
+            </a:r>
+          </a:p>
+          <a:p>
+            <a:r>
+              <a:rPr lang="zh-CN" dirty="0"/>
+              <a:t>本节目标：独立完成单元 19 练习，守住数据隔离红线</a:t>
+            </a:r>
+          </a:p>
+          <a:p>
+            <a:r>
+              <a:rPr lang="zh-CN" dirty="0"/>
+              <a:t/>
+            </a:r>
+          </a:p>
+          <a:p>
+            <a:r>
+              <a:rPr lang="zh-CN" dirty="0"/>
+              <a:t>看不到懂的地方，回讲义对应小节读一遍，再回来对着这页复述一次——能讲出来才算真懂。</a:t>
+            </a:r>
+          </a:p>
+        </p:txBody>
+      </p:sp>
+    </p:spTree>
+  </p:cSld>
+  <p:clrMapOvr>
+    <a:masterClrMapping/>
+  </p:clrMapOvr>
+</p:notes>
+</file>
+
+<file path=ppt/notesSlides/notesSlide12.xml><?xml version="1.0" encoding="utf-8"?>
+<p:notes xmlns:a="http://schemas.openxmlformats.org/drawingml/2006/main" xmlns:p="http://schemas.openxmlformats.org/presentationml/2006/main" xmlns:r="http://schemas.openxmlformats.org/officeDocument/2006/relationships">
+  <p:cSld>
+    <p:spTree>
+      <p:nvGrpSpPr>
+        <p:cNvPr id="1" name=""/>
+        <p:cNvGrpSpPr/>
+        <p:nvPr/>
+      </p:nvGrpSpPr>
+      <p:grpSpPr>
+        <a:xfrm>
+          <a:off x="0" y="0"/>
+          <a:ext cx="0" cy="0"/>
+          <a:chOff x="0" y="0"/>
+          <a:chExt cx="0" cy="0"/>
+        </a:xfrm>
+      </p:grpSpPr>
+      <p:sp>
+        <p:nvSpPr>
+          <p:cNvPr id="2" name="讲课提示"/>
+          <p:cNvSpPr txBox="1"/>
+          <p:nvPr/>
+        </p:nvSpPr>
+        <p:spPr>
+          <a:xfrm>
+            <a:off x="457200" y="457200"/>
+            <a:ext cx="6858000" cy="4800600"/>
+          </a:xfrm>
+          <a:prstGeom prst="rect">
+            <a:avLst/>
+          </a:prstGeom>
+        </p:spPr>
+        <p:txBody>
+          <a:bodyPr wrap="square"/>
+          <a:lstStyle/>
+          <a:p>
+            <a:r>
+              <a:rPr lang="zh-CN" dirty="0"/>
+              <a:t>单元 19 小结 · 单元 19 · 小结</a:t>
+            </a:r>
+          </a:p>
+          <a:p>
+            <a:r>
+              <a:rPr lang="zh-CN" dirty="0"/>
+              <a:t/>
+            </a:r>
+          </a:p>
+          <a:p>
+            <a:r>
+              <a:rPr lang="zh-CN" dirty="0"/>
+              <a:t>收尾动作：让学生合上讲义，口述本单元三个最重要的结论；说不出来的，回对应课节。</a:t>
+            </a:r>
+          </a:p>
+          <a:p>
+            <a:r>
+              <a:rPr lang="zh-CN" dirty="0"/>
+              <a:t>然后当场勾一遍本单元课节的「已完成」，没打勾的进下一单元前补掉。</a:t>
+            </a:r>
+          </a:p>
+        </p:txBody>
+      </p:sp>
+    </p:spTree>
+  </p:cSld>
+  <p:clrMapOvr>
+    <a:masterClrMapping/>
+  </p:clrMapOvr>
+</p:notes>
+</file>
+
+<file path=ppt/notesSlides/notesSlide2.xml><?xml version="1.0" encoding="utf-8"?>
+<p:notes xmlns:a="http://schemas.openxmlformats.org/drawingml/2006/main" xmlns:p="http://schemas.openxmlformats.org/presentationml/2006/main" xmlns:r="http://schemas.openxmlformats.org/officeDocument/2006/relationships">
+  <p:cSld>
+    <p:spTree>
+      <p:nvGrpSpPr>
+        <p:cNvPr id="1" name=""/>
+        <p:cNvGrpSpPr/>
+        <p:nvPr/>
+      </p:nvGrpSpPr>
+      <p:grpSpPr>
+        <a:xfrm>
+          <a:off x="0" y="0"/>
+          <a:ext cx="0" cy="0"/>
+          <a:chOff x="0" y="0"/>
+          <a:chExt cx="0" cy="0"/>
+        </a:xfrm>
+      </p:grpSpPr>
+      <p:sp>
+        <p:nvSpPr>
+          <p:cNvPr id="2" name="讲课提示"/>
+          <p:cNvSpPr txBox="1"/>
+          <p:nvPr/>
+        </p:nvSpPr>
+        <p:spPr>
+          <a:xfrm>
+            <a:off x="457200" y="457200"/>
+            <a:ext cx="6858000" cy="4800600"/>
+          </a:xfrm>
+          <a:prstGeom prst="rect">
+            <a:avLst/>
+          </a:prstGeom>
+        </p:spPr>
+        <p:txBody>
+          <a:bodyPr wrap="square"/>
+          <a:lstStyle/>
+          <a:p>
+            <a:r>
+              <a:rPr lang="zh-CN" dirty="0"/>
+              <a:t>第 98 节 · 表单与数据归属三段式</a:t>
+            </a:r>
+          </a:p>
+          <a:p>
+            <a:r>
+              <a:rPr lang="zh-CN" dirty="0"/>
+              <a:t>单元 19 · 用户账户 · W25</a:t>
+            </a:r>
+          </a:p>
+          <a:p>
+            <a:r>
+              <a:rPr lang="zh-CN" dirty="0"/>
+              <a:t/>
+            </a:r>
+          </a:p>
+          <a:p>
+            <a:r>
+              <a:rPr lang="zh-CN" dirty="0"/>
+              <a:t>学习目标：会用 ModelForm；掌握 `is_valid → save(commit=False) → 补 owner → save`</a:t>
+            </a:r>
+          </a:p>
+          <a:p>
+            <a:r>
+              <a:rPr lang="zh-CN" dirty="0"/>
+              <a:t/>
+            </a:r>
+          </a:p>
+          <a:p>
+            <a:r>
+              <a:rPr lang="zh-CN" dirty="0"/>
+              <a:t>课堂实操（40 分钟，不看答案）：</a:t>
+            </a:r>
+          </a:p>
+          <a:p>
+            <a:r>
+              <a:rPr lang="zh-CN" dirty="0"/>
+              <a:t>· 实现一个 ModelForm 并渲染它</a:t>
+            </a:r>
+          </a:p>
+          <a:p>
+            <a:r>
+              <a:rPr lang="zh-CN" dirty="0"/>
+              <a:t>· 故意不补 owner，看数据归属错在哪</a:t>
+            </a:r>
+          </a:p>
+          <a:p>
+            <a:r>
+              <a:rPr lang="zh-CN" dirty="0"/>
+              <a:t/>
+            </a:r>
+          </a:p>
+          <a:p>
+            <a:r>
+              <a:rPr lang="zh-CN" dirty="0"/>
+              <a:t>课后作业：</a:t>
+            </a:r>
+          </a:p>
+          <a:p>
+            <a:r>
+              <a:rPr lang="zh-CN" dirty="0"/>
+              <a:t>· 完成教材 19.1 全部动手练</a:t>
+            </a:r>
+          </a:p>
+          <a:p>
+            <a:r>
+              <a:rPr lang="zh-CN" dirty="0"/>
+              <a:t/>
+            </a:r>
+          </a:p>
+          <a:p>
+            <a:r>
+              <a:rPr lang="zh-CN" dirty="0"/>
+              <a:t>节奏：讲 20 分钟 → 学员自己敲 40 分钟（不看答案）→ 对讲评自查 20 分钟 → 写作业 10 分钟。</a:t>
+            </a:r>
+          </a:p>
+        </p:txBody>
+      </p:sp>
+    </p:spTree>
+  </p:cSld>
+  <p:clrMapOvr>
+    <a:masterClrMapping/>
+  </p:clrMapOvr>
+</p:notes>
+</file>
+
+<file path=ppt/notesSlides/notesSlide3.xml><?xml version="1.0" encoding="utf-8"?>
+<p:notes xmlns:a="http://schemas.openxmlformats.org/drawingml/2006/main" xmlns:p="http://schemas.openxmlformats.org/presentationml/2006/main" xmlns:r="http://schemas.openxmlformats.org/officeDocument/2006/relationships">
+  <p:cSld>
+    <p:spTree>
+      <p:nvGrpSpPr>
+        <p:cNvPr id="1" name=""/>
+        <p:cNvGrpSpPr/>
+        <p:nvPr/>
+      </p:nvGrpSpPr>
+      <p:grpSpPr>
+        <a:xfrm>
+          <a:off x="0" y="0"/>
+          <a:ext cx="0" cy="0"/>
+          <a:chOff x="0" y="0"/>
+          <a:chExt cx="0" cy="0"/>
+        </a:xfrm>
+      </p:grpSpPr>
+      <p:sp>
+        <p:nvSpPr>
+          <p:cNvPr id="2" name="讲课提示"/>
+          <p:cNvSpPr txBox="1"/>
+          <p:nvPr/>
+        </p:nvSpPr>
+        <p:spPr>
+          <a:xfrm>
+            <a:off x="457200" y="457200"/>
+            <a:ext cx="6858000" cy="4800600"/>
+          </a:xfrm>
+          <a:prstGeom prst="rect">
+            <a:avLst/>
+          </a:prstGeom>
+        </p:spPr>
+        <p:txBody>
+          <a:bodyPr wrap="square"/>
+          <a:lstStyle/>
+          <a:p>
+            <a:r>
+              <a:rPr lang="zh-CN" dirty="0"/>
+              <a:t>第 98 节 · 核心知识点：表单与数据归属三段式</a:t>
+            </a:r>
+          </a:p>
+          <a:p>
+            <a:r>
+              <a:rPr lang="zh-CN" dirty="0"/>
+              <a:t/>
+            </a:r>
+          </a:p>
+          <a:p>
+            <a:r>
+              <a:rPr lang="zh-CN" dirty="0"/>
+              <a:t>讲这一页时：先让学生说出上节课的结论，再逐块讲要点。</a:t>
+            </a:r>
+          </a:p>
+          <a:p>
+            <a:r>
+              <a:rPr lang="zh-CN" dirty="0"/>
+              <a:t>每讲完一块，问一句「这一步如果写错了，报错会长什么样？」——把错误提前讲。</a:t>
+            </a:r>
+          </a:p>
+          <a:p>
+            <a:r>
+              <a:rPr lang="zh-CN" dirty="0"/>
+              <a:t/>
+            </a:r>
+          </a:p>
+          <a:p>
+            <a:r>
+              <a:rPr lang="zh-CN" dirty="0"/>
+              <a:t>本节目标：会用 ModelForm；掌握 `is_valid → save(commit=False) → 补 owner → save`</a:t>
+            </a:r>
+          </a:p>
+          <a:p>
+            <a:r>
+              <a:rPr lang="zh-CN" dirty="0"/>
+              <a:t/>
+            </a:r>
+          </a:p>
+          <a:p>
+            <a:r>
+              <a:rPr lang="zh-CN" dirty="0"/>
+              <a:t>看不到懂的地方，回讲义对应小节读一遍，再回来对着这页复述一次——能讲出来才算真懂。</a:t>
+            </a:r>
+          </a:p>
+        </p:txBody>
+      </p:sp>
+    </p:spTree>
+  </p:cSld>
+  <p:clrMapOvr>
+    <a:masterClrMapping/>
+  </p:clrMapOvr>
+</p:notes>
+</file>
+
+<file path=ppt/notesSlides/notesSlide4.xml><?xml version="1.0" encoding="utf-8"?>
+<p:notes xmlns:a="http://schemas.openxmlformats.org/drawingml/2006/main" xmlns:p="http://schemas.openxmlformats.org/presentationml/2006/main" xmlns:r="http://schemas.openxmlformats.org/officeDocument/2006/relationships">
+  <p:cSld>
+    <p:spTree>
+      <p:nvGrpSpPr>
+        <p:cNvPr id="1" name=""/>
+        <p:cNvGrpSpPr/>
+        <p:nvPr/>
+      </p:nvGrpSpPr>
+      <p:grpSpPr>
+        <a:xfrm>
+          <a:off x="0" y="0"/>
+          <a:ext cx="0" cy="0"/>
+          <a:chOff x="0" y="0"/>
+          <a:chExt cx="0" cy="0"/>
+        </a:xfrm>
+      </p:grpSpPr>
+      <p:sp>
+        <p:nvSpPr>
+          <p:cNvPr id="2" name="讲课提示"/>
+          <p:cNvSpPr txBox="1"/>
+          <p:nvPr/>
+        </p:nvSpPr>
+        <p:spPr>
+          <a:xfrm>
+            <a:off x="457200" y="457200"/>
+            <a:ext cx="6858000" cy="4800600"/>
+          </a:xfrm>
+          <a:prstGeom prst="rect">
+            <a:avLst/>
+          </a:prstGeom>
+        </p:spPr>
+        <p:txBody>
+          <a:bodyPr wrap="square"/>
+          <a:lstStyle/>
+          <a:p>
+            <a:r>
+              <a:rPr lang="zh-CN" dirty="0"/>
+              <a:t>第 99 节 · 登录、注销与注册三件套</a:t>
+            </a:r>
+          </a:p>
+          <a:p>
+            <a:r>
+              <a:rPr lang="zh-CN" dirty="0"/>
+              <a:t>单元 19 · 用户账户 · W25</a:t>
+            </a:r>
+          </a:p>
+          <a:p>
+            <a:r>
+              <a:rPr lang="zh-CN" dirty="0"/>
+              <a:t/>
+            </a:r>
+          </a:p>
+          <a:p>
+            <a:r>
+              <a:rPr lang="zh-CN" dirty="0"/>
+              <a:t>学习目标：会用 Django 自带的 auth 视图；会写注册页</a:t>
+            </a:r>
+          </a:p>
+          <a:p>
+            <a:r>
+              <a:rPr lang="zh-CN" dirty="0"/>
+              <a:t/>
+            </a:r>
+          </a:p>
+          <a:p>
+            <a:r>
+              <a:rPr lang="zh-CN" dirty="0"/>
+              <a:t>课堂实操（40 分钟，不看答案）：</a:t>
+            </a:r>
+          </a:p>
+          <a:p>
+            <a:r>
+              <a:rPr lang="zh-CN" dirty="0"/>
+              <a:t>· 实现登录与注销并测试</a:t>
+            </a:r>
+          </a:p>
+          <a:p>
+            <a:r>
+              <a:rPr lang="zh-CN" dirty="0"/>
+              <a:t>· 故意不注册 logout 的 URL 看会怎样</a:t>
+            </a:r>
+          </a:p>
+          <a:p>
+            <a:r>
+              <a:rPr lang="zh-CN" dirty="0"/>
+              <a:t/>
+            </a:r>
+          </a:p>
+          <a:p>
+            <a:r>
+              <a:rPr lang="zh-CN" dirty="0"/>
+              <a:t>课后作业：</a:t>
+            </a:r>
+          </a:p>
+          <a:p>
+            <a:r>
+              <a:rPr lang="zh-CN" dirty="0"/>
+              <a:t>· 产出：能注册登录的网站</a:t>
+            </a:r>
+          </a:p>
+          <a:p>
+            <a:r>
+              <a:rPr lang="zh-CN" dirty="0"/>
+              <a:t/>
+            </a:r>
+          </a:p>
+          <a:p>
+            <a:r>
+              <a:rPr lang="zh-CN" dirty="0"/>
+              <a:t>节奏：讲 20 分钟 → 学员自己敲 40 分钟（不看答案）→ 对讲评自查 20 分钟 → 写作业 10 分钟。</a:t>
+            </a:r>
+          </a:p>
+        </p:txBody>
+      </p:sp>
+    </p:spTree>
+  </p:cSld>
+  <p:clrMapOvr>
+    <a:masterClrMapping/>
+  </p:clrMapOvr>
+</p:notes>
+</file>
+
+<file path=ppt/notesSlides/notesSlide5.xml><?xml version="1.0" encoding="utf-8"?>
+<p:notes xmlns:a="http://schemas.openxmlformats.org/drawingml/2006/main" xmlns:p="http://schemas.openxmlformats.org/presentationml/2006/main" xmlns:r="http://schemas.openxmlformats.org/officeDocument/2006/relationships">
+  <p:cSld>
+    <p:spTree>
+      <p:nvGrpSpPr>
+        <p:cNvPr id="1" name=""/>
+        <p:cNvGrpSpPr/>
+        <p:nvPr/>
+      </p:nvGrpSpPr>
+      <p:grpSpPr>
+        <a:xfrm>
+          <a:off x="0" y="0"/>
+          <a:ext cx="0" cy="0"/>
+          <a:chOff x="0" y="0"/>
+          <a:chExt cx="0" cy="0"/>
+        </a:xfrm>
+      </p:grpSpPr>
+      <p:sp>
+        <p:nvSpPr>
+          <p:cNvPr id="2" name="讲课提示"/>
+          <p:cNvSpPr txBox="1"/>
+          <p:nvPr/>
+        </p:nvSpPr>
+        <p:spPr>
+          <a:xfrm>
+            <a:off x="457200" y="457200"/>
+            <a:ext cx="6858000" cy="4800600"/>
+          </a:xfrm>
+          <a:prstGeom prst="rect">
+            <a:avLst/>
+          </a:prstGeom>
+        </p:spPr>
+        <p:txBody>
+          <a:bodyPr wrap="square"/>
+          <a:lstStyle/>
+          <a:p>
+            <a:r>
+              <a:rPr lang="zh-CN" dirty="0"/>
+              <a:t>第 99 节 · 核心知识点：登录、注销与注册三件套</a:t>
+            </a:r>
+          </a:p>
+          <a:p>
+            <a:r>
+              <a:rPr lang="zh-CN" dirty="0"/>
+              <a:t/>
+            </a:r>
+          </a:p>
+          <a:p>
+            <a:r>
+              <a:rPr lang="zh-CN" dirty="0"/>
+              <a:t>讲这一页时：先让学生说出上节课的结论，再逐块讲要点。</a:t>
+            </a:r>
+          </a:p>
+          <a:p>
+            <a:r>
+              <a:rPr lang="zh-CN" dirty="0"/>
+              <a:t>每讲完一块，问一句「这一步如果写错了，报错会长什么样？」——把错误提前讲。</a:t>
+            </a:r>
+          </a:p>
+          <a:p>
+            <a:r>
+              <a:rPr lang="zh-CN" dirty="0"/>
+              <a:t/>
+            </a:r>
+          </a:p>
+          <a:p>
+            <a:r>
+              <a:rPr lang="zh-CN" dirty="0"/>
+              <a:t>本节目标：会用 Django 自带的 auth 视图；会写注册页</a:t>
+            </a:r>
+          </a:p>
+          <a:p>
+            <a:r>
+              <a:rPr lang="zh-CN" dirty="0"/>
+              <a:t/>
+            </a:r>
+          </a:p>
+          <a:p>
+            <a:r>
+              <a:rPr lang="zh-CN" dirty="0"/>
+              <a:t>看不到懂的地方，回讲义对应小节读一遍，再回来对着这页复述一次——能讲出来才算真懂。</a:t>
+            </a:r>
+          </a:p>
+        </p:txBody>
+      </p:sp>
+    </p:spTree>
+  </p:cSld>
+  <p:clrMapOvr>
+    <a:masterClrMapping/>
+  </p:clrMapOvr>
+</p:notes>
+</file>
+
+<file path=ppt/notesSlides/notesSlide6.xml><?xml version="1.0" encoding="utf-8"?>
+<p:notes xmlns:a="http://schemas.openxmlformats.org/drawingml/2006/main" xmlns:p="http://schemas.openxmlformats.org/presentationml/2006/main" xmlns:r="http://schemas.openxmlformats.org/officeDocument/2006/relationships">
+  <p:cSld>
+    <p:spTree>
+      <p:nvGrpSpPr>
+        <p:cNvPr id="1" name=""/>
+        <p:cNvGrpSpPr/>
+        <p:nvPr/>
+      </p:nvGrpSpPr>
+      <p:grpSpPr>
+        <a:xfrm>
+          <a:off x="0" y="0"/>
+          <a:ext cx="0" cy="0"/>
+          <a:chOff x="0" y="0"/>
+          <a:chExt cx="0" cy="0"/>
+        </a:xfrm>
+      </p:grpSpPr>
+      <p:sp>
+        <p:nvSpPr>
+          <p:cNvPr id="2" name="讲课提示"/>
+          <p:cNvSpPr txBox="1"/>
+          <p:nvPr/>
+        </p:nvSpPr>
+        <p:spPr>
+          <a:xfrm>
+            <a:off x="457200" y="457200"/>
+            <a:ext cx="6858000" cy="4800600"/>
+          </a:xfrm>
+          <a:prstGeom prst="rect">
+            <a:avLst/>
+          </a:prstGeom>
+        </p:spPr>
+        <p:txBody>
+          <a:bodyPr wrap="square"/>
+          <a:lstStyle/>
+          <a:p>
+            <a:r>
+              <a:rPr lang="zh-CN" dirty="0"/>
+              <a:t>第 100 节 · ★ @login_required 与数据隔离红线</a:t>
+            </a:r>
+          </a:p>
+          <a:p>
+            <a:r>
+              <a:rPr lang="zh-CN" dirty="0"/>
+              <a:t>单元 19 · 用户账户 · W25–W26</a:t>
+            </a:r>
+          </a:p>
+          <a:p>
+            <a:r>
+              <a:rPr lang="zh-CN" dirty="0"/>
+              <a:t/>
+            </a:r>
+          </a:p>
+          <a:p>
+            <a:r>
+              <a:rPr lang="zh-CN" dirty="0"/>
+              <a:t>学习目标：会用装饰器限制访问；理解 `filter(owner=request.user)` 为什么不能写 all()</a:t>
+            </a:r>
+          </a:p>
+          <a:p>
+            <a:r>
+              <a:rPr lang="zh-CN" dirty="0"/>
+              <a:t/>
+            </a:r>
+          </a:p>
+          <a:p>
+            <a:r>
+              <a:rPr lang="zh-CN" dirty="0"/>
+              <a:t>课堂实操（40 分钟，不看答案）：</a:t>
+            </a:r>
+          </a:p>
+          <a:p>
+            <a:r>
+              <a:rPr lang="zh-CN" dirty="0"/>
+              <a:t>· ★ 现场把 filter 改成 all()，用两个账号看数据串了</a:t>
+            </a:r>
+          </a:p>
+          <a:p>
+            <a:r>
+              <a:rPr lang="zh-CN" dirty="0"/>
+              <a:t>· 再改回 filter，验证隔离生效</a:t>
+            </a:r>
+          </a:p>
+          <a:p>
+            <a:r>
+              <a:rPr lang="zh-CN" dirty="0"/>
+              <a:t/>
+            </a:r>
+          </a:p>
+          <a:p>
+            <a:r>
+              <a:rPr lang="zh-CN" dirty="0"/>
+              <a:t>课后作业：</a:t>
+            </a:r>
+          </a:p>
+          <a:p>
+            <a:r>
+              <a:rPr lang="zh-CN" dirty="0"/>
+              <a:t>· ★ 产出：数据按用户隔离的网站</a:t>
+            </a:r>
+          </a:p>
+          <a:p>
+            <a:r>
+              <a:rPr lang="zh-CN" dirty="0"/>
+              <a:t/>
+            </a:r>
+          </a:p>
+          <a:p>
+            <a:r>
+              <a:rPr lang="zh-CN" dirty="0"/>
+              <a:t>节奏：讲 20 分钟 → 学员自己敲 40 分钟（不看答案）→ 对讲评自查 20 分钟 → 写作业 10 分钟。</a:t>
+            </a:r>
+          </a:p>
+        </p:txBody>
+      </p:sp>
+    </p:spTree>
+  </p:cSld>
+  <p:clrMapOvr>
+    <a:masterClrMapping/>
+  </p:clrMapOvr>
+</p:notes>
+</file>
+
+<file path=ppt/notesSlides/notesSlide7.xml><?xml version="1.0" encoding="utf-8"?>
+<p:notes xmlns:a="http://schemas.openxmlformats.org/drawingml/2006/main" xmlns:p="http://schemas.openxmlformats.org/presentationml/2006/main" xmlns:r="http://schemas.openxmlformats.org/officeDocument/2006/relationships">
+  <p:cSld>
+    <p:spTree>
+      <p:nvGrpSpPr>
+        <p:cNvPr id="1" name=""/>
+        <p:cNvGrpSpPr/>
+        <p:nvPr/>
+      </p:nvGrpSpPr>
+      <p:grpSpPr>
+        <a:xfrm>
+          <a:off x="0" y="0"/>
+          <a:ext cx="0" cy="0"/>
+          <a:chOff x="0" y="0"/>
+          <a:chExt cx="0" cy="0"/>
+        </a:xfrm>
+      </p:grpSpPr>
+      <p:sp>
+        <p:nvSpPr>
+          <p:cNvPr id="2" name="讲课提示"/>
+          <p:cNvSpPr txBox="1"/>
+          <p:nvPr/>
+        </p:nvSpPr>
+        <p:spPr>
+          <a:xfrm>
+            <a:off x="457200" y="457200"/>
+            <a:ext cx="6858000" cy="4800600"/>
+          </a:xfrm>
+          <a:prstGeom prst="rect">
+            <a:avLst/>
+          </a:prstGeom>
+        </p:spPr>
+        <p:txBody>
+          <a:bodyPr wrap="square"/>
+          <a:lstStyle/>
+          <a:p>
+            <a:r>
+              <a:rPr lang="zh-CN" dirty="0"/>
+              <a:t>第 100 节 · 核心知识点：★ @login_required 与数据隔离红线</a:t>
+            </a:r>
+          </a:p>
+          <a:p>
+            <a:r>
+              <a:rPr lang="zh-CN" dirty="0"/>
+              <a:t/>
+            </a:r>
+          </a:p>
+          <a:p>
+            <a:r>
+              <a:rPr lang="zh-CN" dirty="0"/>
+              <a:t>讲这一页时：先让学生说出上节课的结论，再逐块讲要点。</a:t>
+            </a:r>
+          </a:p>
+          <a:p>
+            <a:r>
+              <a:rPr lang="zh-CN" dirty="0"/>
+              <a:t>每讲完一块，问一句「这一步如果写错了，报错会长什么样？」——把错误提前讲。</a:t>
+            </a:r>
+          </a:p>
+          <a:p>
+            <a:r>
+              <a:rPr lang="zh-CN" dirty="0"/>
+              <a:t/>
+            </a:r>
+          </a:p>
+          <a:p>
+            <a:r>
+              <a:rPr lang="zh-CN" dirty="0"/>
+              <a:t>本节目标：会用装饰器限制访问；理解 `filter(owner=request.user)` 为什么不能写 all()</a:t>
+            </a:r>
+          </a:p>
+          <a:p>
+            <a:r>
+              <a:rPr lang="zh-CN" dirty="0"/>
+              <a:t/>
+            </a:r>
+          </a:p>
+          <a:p>
+            <a:r>
+              <a:rPr lang="zh-CN" dirty="0"/>
+              <a:t>看不到懂的地方，回讲义对应小节读一遍，再回来对着这页复述一次——能讲出来才算真懂。</a:t>
+            </a:r>
+          </a:p>
+        </p:txBody>
+      </p:sp>
+    </p:spTree>
+  </p:cSld>
+  <p:clrMapOvr>
+    <a:masterClrMapping/>
+  </p:clrMapOvr>
+</p:notes>
+</file>
+
+<file path=ppt/notesSlides/notesSlide8.xml><?xml version="1.0" encoding="utf-8"?>
+<p:notes xmlns:a="http://schemas.openxmlformats.org/drawingml/2006/main" xmlns:p="http://schemas.openxmlformats.org/presentationml/2006/main" xmlns:r="http://schemas.openxmlformats.org/officeDocument/2006/relationships">
+  <p:cSld>
+    <p:spTree>
+      <p:nvGrpSpPr>
+        <p:cNvPr id="1" name=""/>
+        <p:cNvGrpSpPr/>
+        <p:nvPr/>
+      </p:nvGrpSpPr>
+      <p:grpSpPr>
+        <a:xfrm>
+          <a:off x="0" y="0"/>
+          <a:ext cx="0" cy="0"/>
+          <a:chOff x="0" y="0"/>
+          <a:chExt cx="0" cy="0"/>
+        </a:xfrm>
+      </p:grpSpPr>
+      <p:sp>
+        <p:nvSpPr>
+          <p:cNvPr id="2" name="讲课提示"/>
+          <p:cNvSpPr txBox="1"/>
+          <p:nvPr/>
+        </p:nvSpPr>
+        <p:spPr>
+          <a:xfrm>
+            <a:off x="457200" y="457200"/>
+            <a:ext cx="6858000" cy="4800600"/>
+          </a:xfrm>
+          <a:prstGeom prst="rect">
+            <a:avLst/>
+          </a:prstGeom>
+        </p:spPr>
+        <p:txBody>
+          <a:bodyPr wrap="square"/>
+          <a:lstStyle/>
+          <a:p>
+            <a:r>
+              <a:rPr lang="zh-CN" dirty="0"/>
+              <a:t>第 101 节 · edit_entry 的双重保护</a:t>
+            </a:r>
+          </a:p>
+          <a:p>
+            <a:r>
+              <a:rPr lang="zh-CN" dirty="0"/>
+              <a:t>单元 19 · 用户账户 · W26</a:t>
+            </a:r>
+          </a:p>
+          <a:p>
+            <a:r>
+              <a:rPr lang="zh-CN" dirty="0"/>
+              <a:t/>
+            </a:r>
+          </a:p>
+          <a:p>
+            <a:r>
+              <a:rPr lang="zh-CN" dirty="0"/>
+              <a:t>学习目标：会同时校验条目所属主题与主题所属用户</a:t>
+            </a:r>
+          </a:p>
+          <a:p>
+            <a:r>
+              <a:rPr lang="zh-CN" dirty="0"/>
+              <a:t/>
+            </a:r>
+          </a:p>
+          <a:p>
+            <a:r>
+              <a:rPr lang="zh-CN" dirty="0"/>
+              <a:t>课堂实操（40 分钟，不看答案）：</a:t>
+            </a:r>
+          </a:p>
+          <a:p>
+            <a:r>
+              <a:rPr lang="zh-CN" dirty="0"/>
+              <a:t>· 实现双重校验</a:t>
+            </a:r>
+          </a:p>
+          <a:p>
+            <a:r>
+              <a:rPr lang="zh-CN" dirty="0"/>
+              <a:t>· 用一个账号去改另一个账号的条目，应被拒</a:t>
+            </a:r>
+          </a:p>
+          <a:p>
+            <a:r>
+              <a:rPr lang="zh-CN" dirty="0"/>
+              <a:t/>
+            </a:r>
+          </a:p>
+          <a:p>
+            <a:r>
+              <a:rPr lang="zh-CN" dirty="0"/>
+              <a:t>课后作业：</a:t>
+            </a:r>
+          </a:p>
+          <a:p>
+            <a:r>
+              <a:rPr lang="zh-CN" dirty="0"/>
+              <a:t>· 完成教材 19.3 全部动手练</a:t>
+            </a:r>
+          </a:p>
+          <a:p>
+            <a:r>
+              <a:rPr lang="zh-CN" dirty="0"/>
+              <a:t/>
+            </a:r>
+          </a:p>
+          <a:p>
+            <a:r>
+              <a:rPr lang="zh-CN" dirty="0"/>
+              <a:t>节奏：讲 20 分钟 → 学员自己敲 40 分钟（不看答案）→ 对讲评自查 20 分钟 → 写作业 10 分钟。</a:t>
+            </a:r>
+          </a:p>
+        </p:txBody>
+      </p:sp>
+    </p:spTree>
+  </p:cSld>
+  <p:clrMapOvr>
+    <a:masterClrMapping/>
+  </p:clrMapOvr>
+</p:notes>
+</file>
+
+<file path=ppt/notesSlides/notesSlide9.xml><?xml version="1.0" encoding="utf-8"?>
+<p:notes xmlns:a="http://schemas.openxmlformats.org/drawingml/2006/main" xmlns:p="http://schemas.openxmlformats.org/presentationml/2006/main" xmlns:r="http://schemas.openxmlformats.org/officeDocument/2006/relationships">
+  <p:cSld>
+    <p:spTree>
+      <p:nvGrpSpPr>
+        <p:cNvPr id="1" name=""/>
+        <p:cNvGrpSpPr/>
+        <p:nvPr/>
+      </p:nvGrpSpPr>
+      <p:grpSpPr>
+        <a:xfrm>
+          <a:off x="0" y="0"/>
+          <a:ext cx="0" cy="0"/>
+          <a:chOff x="0" y="0"/>
+          <a:chExt cx="0" cy="0"/>
+        </a:xfrm>
+      </p:grpSpPr>
+      <p:sp>
+        <p:nvSpPr>
+          <p:cNvPr id="2" name="讲课提示"/>
+          <p:cNvSpPr txBox="1"/>
+          <p:nvPr/>
+        </p:nvSpPr>
+        <p:spPr>
+          <a:xfrm>
+            <a:off x="457200" y="457200"/>
+            <a:ext cx="6858000" cy="4800600"/>
+          </a:xfrm>
+          <a:prstGeom prst="rect">
+            <a:avLst/>
+          </a:prstGeom>
+        </p:spPr>
+        <p:txBody>
+          <a:bodyPr wrap="square"/>
+          <a:lstStyle/>
+          <a:p>
+            <a:r>
+              <a:rPr lang="zh-CN" dirty="0"/>
+              <a:t>第 101 节 · 核心知识点：edit_entry 的双重保护</a:t>
+            </a:r>
+          </a:p>
+          <a:p>
+            <a:r>
+              <a:rPr lang="zh-CN" dirty="0"/>
+              <a:t/>
+            </a:r>
+          </a:p>
+          <a:p>
+            <a:r>
+              <a:rPr lang="zh-CN" dirty="0"/>
+              <a:t>讲这一页时：先让学生说出上节课的结论，再逐块讲要点。</a:t>
+            </a:r>
+          </a:p>
+          <a:p>
+            <a:r>
+              <a:rPr lang="zh-CN" dirty="0"/>
+              <a:t>每讲完一块，问一句「这一步如果写错了，报错会长什么样？」——把错误提前讲。</a:t>
+            </a:r>
+          </a:p>
+          <a:p>
+            <a:r>
+              <a:rPr lang="zh-CN" dirty="0"/>
+              <a:t/>
+            </a:r>
+          </a:p>
+          <a:p>
+            <a:r>
+              <a:rPr lang="zh-CN" dirty="0"/>
+              <a:t>本节目标：会同时校验条目所属主题与主题所属用户</a:t>
+            </a:r>
+          </a:p>
+          <a:p>
+            <a:r>
+              <a:rPr lang="zh-CN" dirty="0"/>
+              <a:t/>
+            </a:r>
+          </a:p>
+          <a:p>
+            <a:r>
+              <a:rPr lang="zh-CN" dirty="0"/>
+              <a:t>看不到懂的地方，回讲义对应小节读一遍，再回来对着这页复述一次——能讲出来才算真懂。</a:t>
+            </a:r>
+          </a:p>
+        </p:txBody>
+      </p:sp>
+    </p:spTree>
+  </p:cSld>
+  <p:clrMapOvr>
+    <a:masterClrMapping/>
+  </p:clrMapOvr>
+</p:notes>
 </file>
 
 <file path=ppt/slideLayouts/slideLayout1.xml><?xml version="1.0" encoding="utf-8"?>
